--- a/public/fun/pack/pptx/talk/발표템플릿_35_연말결산·회고_밤줍던산.pptx
+++ b/public/fun/pack/pptx/talk/발표템플릿_35_연말결산·회고_밤줍던산.pptx
@@ -3286,6 +3286,14 @@
 <file path=ppt/slides/slide1.xml><?xml version="1.0" encoding="utf-8"?>
 <p:sld xmlns:a="http://schemas.openxmlformats.org/drawingml/2006/main" xmlns:p="http://schemas.openxmlformats.org/presentationml/2006/main" xmlns:r="http://schemas.openxmlformats.org/officeDocument/2006/relationships">
   <p:cSld>
+    <p:bg>
+      <p:bgPr>
+        <a:solidFill>
+          <a:srgbClr val="493827"/>
+        </a:solidFill>
+        <a:effectLst/>
+      </p:bgPr>
+    </p:bg>
     <p:spTree>
       <p:nvGrpSpPr>
         <p:cNvPr id="1" name=""/>
@@ -3293,30 +3301,131 @@
         <p:nvPr/>
       </p:nvGrpSpPr>
       <p:grpSpPr/>
-      <p:pic>
-        <p:nvPicPr>
-          <p:cNvPr id="3" name="표지 그림" descr="talk-35.jpg"/>
-          <p:cNvPicPr>
-            <a:picLocks noChangeAspect="1"/>
-          </p:cNvPicPr>
+      <p:sp>
+        <p:nvSpPr>
+          <p:cNvPr id="3" name="장식"/>
+          <p:cNvSpPr/>
           <p:nvPr/>
-        </p:nvPicPr>
-        <p:blipFill>
-          <a:blip r:embed="rId2"/>
-          <a:stretch>
-            <a:fillRect/>
-          </a:stretch>
-        </p:blipFill>
-        <p:spPr>
-          <a:xfrm>
-            <a:off x="0" y="0"/>
-            <a:ext cx="12191695" cy="6858000"/>
+        </p:nvSpPr>
+        <p:spPr>
+          <a:xfrm>
+            <a:off x="-1463040" y="3749039"/>
+            <a:ext cx="5486400" cy="5486400"/>
+          </a:xfrm>
+          <a:prstGeom prst="ellipse">
+            <a:avLst/>
+          </a:prstGeom>
+          <a:solidFill>
+            <a:srgbClr val="D8A879"/>
+          </a:solidFill>
+          <a:ln>
+            <a:noFill/>
+          </a:ln>
+        </p:spPr>
+        <p:txBody>
+          <a:bodyPr rtlCol="0" anchor="ctr"/>
+          <a:lstStyle/>
+          <a:p>
+            <a:pPr algn="ctr"/>
+          </a:p>
+        </p:txBody>
+      </p:sp>
+      <p:sp>
+        <p:nvSpPr>
+          <p:cNvPr id="4" name="장식"/>
+          <p:cNvSpPr/>
+          <p:nvPr/>
+        </p:nvSpPr>
+        <p:spPr>
+          <a:xfrm>
+            <a:off x="9997190" y="1371600"/>
+            <a:ext cx="457200" cy="457200"/>
+          </a:xfrm>
+          <a:prstGeom prst="ellipse">
+            <a:avLst/>
+          </a:prstGeom>
+          <a:solidFill>
+            <a:srgbClr val="A6815C"/>
+          </a:solidFill>
+          <a:ln>
+            <a:noFill/>
+          </a:ln>
+        </p:spPr>
+        <p:txBody>
+          <a:bodyPr rtlCol="0" anchor="ctr"/>
+          <a:lstStyle/>
+          <a:p>
+            <a:pPr algn="ctr"/>
+          </a:p>
+        </p:txBody>
+      </p:sp>
+      <p:sp>
+        <p:nvSpPr>
+          <p:cNvPr id="5" name="장식"/>
+          <p:cNvSpPr/>
+          <p:nvPr/>
+        </p:nvSpPr>
+        <p:spPr>
+          <a:xfrm>
+            <a:off x="10972525" y="2468879"/>
+            <a:ext cx="182880" cy="182880"/>
+          </a:xfrm>
+          <a:prstGeom prst="ellipse">
+            <a:avLst/>
+          </a:prstGeom>
+          <a:solidFill>
+            <a:srgbClr val="D8A879"/>
+          </a:solidFill>
+          <a:ln>
+            <a:noFill/>
+          </a:ln>
+        </p:spPr>
+        <p:txBody>
+          <a:bodyPr rtlCol="0" anchor="ctr"/>
+          <a:lstStyle/>
+          <a:p>
+            <a:pPr algn="ctr"/>
+          </a:p>
+        </p:txBody>
+      </p:sp>
+      <p:sp>
+        <p:nvSpPr>
+          <p:cNvPr id="6" name="라벨"/>
+          <p:cNvSpPr txBox="1"/>
+          <p:nvPr/>
+        </p:nvSpPr>
+        <p:spPr>
+          <a:xfrm>
+            <a:off x="822960" y="1600200"/>
+            <a:ext cx="5608179" cy="274320"/>
           </a:xfrm>
           <a:prstGeom prst="rect">
             <a:avLst/>
           </a:prstGeom>
-        </p:spPr>
-      </p:pic>
+          <a:noFill/>
+        </p:spPr>
+        <p:txBody>
+          <a:bodyPr wrap="square" lIns="54864" rIns="54864" tIns="27432" bIns="27432" anchor="t">
+            <a:noAutofit/>
+          </a:bodyPr>
+          <a:lstStyle/>
+          <a:p>
+            <a:pPr algn="l">
+              <a:lnSpc>
+                <a:spcPct val="115000"/>
+              </a:lnSpc>
+            </a:pPr>
+            <a:r>
+              <a:rPr sz="1000" b="1" i="0" spc="250">
+                <a:solidFill>
+                  <a:srgbClr val="FFFFFF"/>
+                </a:solidFill>
+              </a:rPr>
+              <a:t>PRESENTATION</a:t>
+            </a:r>
+          </a:p>
+        </p:txBody>
+      </p:sp>
       <p:sp>
         <p:nvSpPr>
           <p:cNvPr id="2" name="Title 1"/>
@@ -3329,8 +3438,8 @@
         </p:nvSpPr>
         <p:spPr>
           <a:xfrm>
-            <a:off x="853418" y="2057400"/>
-            <a:ext cx="6095847" cy="1554480"/>
+            <a:off x="822960" y="2057400"/>
+            <a:ext cx="5608179" cy="1188720"/>
           </a:xfrm>
         </p:spPr>
         <p:txBody>
@@ -3345,9 +3454,9 @@
               </a:lnSpc>
             </a:pPr>
             <a:r>
-              <a:rPr sz="3600" b="1" i="0">
+              <a:rPr sz="4000" b="1" i="0">
                 <a:solidFill>
-                  <a:srgbClr val="3A2918"/>
+                  <a:srgbClr val="FFFFFF"/>
                 </a:solidFill>
               </a:rPr>
               <a:t>발표 제목을 입력하세요</a:t>
@@ -3357,14 +3466,14 @@
       </p:sp>
       <p:sp>
         <p:nvSpPr>
-          <p:cNvPr id="4" name="한 줄 문구"/>
+          <p:cNvPr id="7" name="한 줄 문구"/>
           <p:cNvSpPr txBox="1"/>
           <p:nvPr/>
         </p:nvSpPr>
         <p:spPr>
           <a:xfrm>
-            <a:off x="853418" y="3749039"/>
-            <a:ext cx="6095847" cy="822960"/>
+            <a:off x="822960" y="3337560"/>
+            <a:ext cx="5608179" cy="822960"/>
           </a:xfrm>
           <a:prstGeom prst="rect">
             <a:avLst/>
@@ -3383,26 +3492,26 @@
               </a:lnSpc>
             </a:pPr>
             <a:r>
-              <a:rPr sz="1700" b="0" i="1">
+              <a:rPr sz="1700" b="0" i="0">
                 <a:solidFill>
-                  <a:srgbClr val="3A2918"/>
+                  <a:srgbClr val="FFFFFF"/>
                 </a:solidFill>
               </a:rPr>
-              <a:t>올해 가장 달라진 점은 이것입니다</a:t>
-            </a:r>
-          </a:p>
-        </p:txBody>
-      </p:sp>
-      <p:sp>
-        <p:nvSpPr>
-          <p:cNvPr id="5" name="안내 문구"/>
+              <a:t>가장 달라진 점은 이것입니다</a:t>
+            </a:r>
+          </a:p>
+        </p:txBody>
+      </p:sp>
+      <p:sp>
+        <p:nvSpPr>
+          <p:cNvPr id="8" name="안내 문구"/>
           <p:cNvSpPr txBox="1"/>
           <p:nvPr/>
         </p:nvSpPr>
         <p:spPr>
           <a:xfrm>
-            <a:off x="853418" y="4617720"/>
-            <a:ext cx="6095847" cy="914400"/>
+            <a:off x="822960" y="4206240"/>
+            <a:ext cx="5608179" cy="914400"/>
           </a:xfrm>
           <a:prstGeom prst="rect">
             <a:avLst/>
@@ -3423,7 +3532,7 @@
             <a:r>
               <a:rPr sz="1400" b="0" i="0">
                 <a:solidFill>
-                  <a:srgbClr val="666666"/>
+                  <a:srgbClr val="FFFFFF"/>
                 </a:solidFill>
               </a:rPr>
               <a:t>연말 결산·회고 · 발표자 이름</a:t>
@@ -3438,10 +3547,10 @@
             <a:r>
               <a:rPr sz="1400" b="0" i="0">
                 <a:solidFill>
-                  <a:srgbClr val="666666"/>
+                  <a:srgbClr val="FFFFFF"/>
                 </a:solidFill>
               </a:rPr>
-              <a:t>2027. 00. 00</a:t>
+              <a:t>날짜 입력</a:t>
             </a:r>
           </a:p>
         </p:txBody>
@@ -3460,7 +3569,7 @@
     <p:bg>
       <p:bgPr>
         <a:solidFill>
-          <a:srgbClr val="EFE0D2"/>
+          <a:srgbClr val="FBF4EC"/>
         </a:solidFill>
         <a:effectLst/>
       </p:bgPr>
@@ -3480,20 +3589,84 @@
         </p:nvSpPr>
         <p:spPr>
           <a:xfrm>
-            <a:off x="274320" y="274320"/>
-            <a:ext cx="11643055" cy="6309360"/>
+            <a:off x="640080" y="6400800"/>
+            <a:ext cx="10911535" cy="10972"/>
           </a:xfrm>
           <a:prstGeom prst="rect">
             <a:avLst/>
           </a:prstGeom>
           <a:solidFill>
-            <a:srgbClr val="FFFFFF"/>
+            <a:srgbClr val="26231F"/>
           </a:solidFill>
-          <a:ln w="25400">
-            <a:solidFill>
-              <a:srgbClr val="7B5732"/>
-            </a:solidFill>
-            <a:prstDash val="dash"/>
+          <a:ln>
+            <a:noFill/>
+          </a:ln>
+        </p:spPr>
+        <p:txBody>
+          <a:bodyPr rtlCol="0" anchor="ctr"/>
+          <a:lstStyle/>
+          <a:p>
+            <a:pPr algn="ctr"/>
+          </a:p>
+        </p:txBody>
+      </p:sp>
+      <p:sp>
+        <p:nvSpPr>
+          <p:cNvPr id="4" name="하단 라벨"/>
+          <p:cNvSpPr txBox="1"/>
+          <p:nvPr/>
+        </p:nvSpPr>
+        <p:spPr>
+          <a:xfrm>
+            <a:off x="640080" y="6437376"/>
+            <a:ext cx="5486400" cy="274320"/>
+          </a:xfrm>
+          <a:prstGeom prst="rect">
+            <a:avLst/>
+          </a:prstGeom>
+          <a:noFill/>
+        </p:spPr>
+        <p:txBody>
+          <a:bodyPr wrap="square" lIns="54864" rIns="54864" tIns="27432" bIns="27432" anchor="ctr">
+            <a:noAutofit/>
+          </a:bodyPr>
+          <a:lstStyle/>
+          <a:p>
+            <a:pPr algn="l">
+              <a:lnSpc>
+                <a:spcPct val="115000"/>
+              </a:lnSpc>
+            </a:pPr>
+            <a:r>
+              <a:rPr sz="900" b="1" i="0" spc="250">
+                <a:solidFill>
+                  <a:srgbClr val="26231F"/>
+                </a:solidFill>
+              </a:rPr>
+              <a:t>PRESENTATION</a:t>
+            </a:r>
+          </a:p>
+        </p:txBody>
+      </p:sp>
+      <p:sp>
+        <p:nvSpPr>
+          <p:cNvPr id="5" name="포인트"/>
+          <p:cNvSpPr/>
+          <p:nvPr/>
+        </p:nvSpPr>
+        <p:spPr>
+          <a:xfrm>
+            <a:off x="11213287" y="6473952"/>
+            <a:ext cx="219456" cy="219456"/>
+          </a:xfrm>
+          <a:prstGeom prst="star4">
+            <a:avLst/>
+          </a:prstGeom>
+          <a:solidFill>
+            <a:srgbClr val="D8A879"/>
+          </a:solidFill>
+          <a:ln>
+            <a:noFill/>
           </a:ln>
         </p:spPr>
         <p:txBody>
@@ -3516,8 +3689,8 @@
         </p:nvSpPr>
         <p:spPr>
           <a:xfrm>
-            <a:off x="777240" y="548640"/>
-            <a:ext cx="9357055" cy="822960"/>
+            <a:off x="640080" y="502920"/>
+            <a:ext cx="10911535" cy="914400"/>
           </a:xfrm>
         </p:spPr>
         <p:txBody>
@@ -3534,7 +3707,7 @@
             <a:r>
               <a:rPr sz="3000" b="1" i="0">
                 <a:solidFill>
-                  <a:srgbClr val="3A2918"/>
+                  <a:srgbClr val="26231F"/>
                 </a:solidFill>
               </a:rPr>
               <a:t>목차</a:t>
@@ -3544,26 +3717,26 @@
       </p:sp>
       <p:sp>
         <p:nvSpPr>
-          <p:cNvPr id="4" name="줄 1"/>
+          <p:cNvPr id="6" name="줄 1"/>
           <p:cNvSpPr/>
           <p:nvPr/>
         </p:nvSpPr>
         <p:spPr>
           <a:xfrm>
-            <a:off x="777240" y="1554480"/>
-            <a:ext cx="10637215" cy="914400"/>
+            <a:off x="640080" y="1600200"/>
+            <a:ext cx="10911535" cy="914400"/>
           </a:xfrm>
           <a:prstGeom prst="roundRect">
             <a:avLst>
-              <a:gd name="adj" fmla="val 8000"/>
+              <a:gd name="adj" fmla="val 3000"/>
             </a:avLst>
           </a:prstGeom>
           <a:solidFill>
-            <a:srgbClr val="F9F5F1"/>
+            <a:srgbClr val="FFFFFF"/>
           </a:solidFill>
-          <a:ln w="12700">
+          <a:ln w="9525">
             <a:solidFill>
-              <a:srgbClr val="EFE0D2"/>
+              <a:srgbClr val="F6E6D5"/>
             </a:solidFill>
           </a:ln>
         </p:spPr>
@@ -3577,20 +3750,51 @@
       </p:sp>
       <p:sp>
         <p:nvSpPr>
-          <p:cNvPr id="5" name="번호 1"/>
+          <p:cNvPr id="7" name="위쪽 띠"/>
           <p:cNvSpPr/>
           <p:nvPr/>
         </p:nvSpPr>
         <p:spPr>
           <a:xfrm>
-            <a:off x="960120" y="1783080"/>
-            <a:ext cx="457200" cy="457200"/>
-          </a:xfrm>
-          <a:prstGeom prst="ellipse">
+            <a:off x="649224" y="1609344"/>
+            <a:ext cx="10893247" cy="82296"/>
+          </a:xfrm>
+          <a:prstGeom prst="rect">
             <a:avLst/>
           </a:prstGeom>
           <a:solidFill>
-            <a:srgbClr val="7B5732"/>
+            <a:srgbClr val="D8A879"/>
+          </a:solidFill>
+          <a:ln>
+            <a:noFill/>
+          </a:ln>
+        </p:spPr>
+        <p:txBody>
+          <a:bodyPr rtlCol="0" anchor="ctr"/>
+          <a:lstStyle/>
+          <a:p>
+            <a:pPr algn="ctr"/>
+          </a:p>
+        </p:txBody>
+      </p:sp>
+      <p:sp>
+        <p:nvSpPr>
+          <p:cNvPr id="8" name="번호 1"/>
+          <p:cNvSpPr/>
+          <p:nvPr/>
+        </p:nvSpPr>
+        <p:spPr>
+          <a:xfrm>
+            <a:off x="822959" y="1828800"/>
+            <a:ext cx="457200" cy="457200"/>
+          </a:xfrm>
+          <a:prstGeom prst="roundRect">
+            <a:avLst>
+              <a:gd name="adj" fmla="val 25000"/>
+            </a:avLst>
+          </a:prstGeom>
+          <a:solidFill>
+            <a:srgbClr val="D8A879"/>
           </a:solidFill>
           <a:ln>
             <a:noFill/>
@@ -3610,7 +3814,7 @@
             <a:r>
               <a:rPr sz="1600" b="1" i="0">
                 <a:solidFill>
-                  <a:srgbClr val="FFFFFF"/>
+                  <a:srgbClr val="26231F"/>
                 </a:solidFill>
               </a:rPr>
               <a:t>1</a:t>
@@ -3620,13 +3824,13 @@
       </p:sp>
       <p:sp>
         <p:nvSpPr>
-          <p:cNvPr id="6" name="TextBox 5"/>
+          <p:cNvPr id="9" name="TextBox 8"/>
           <p:cNvSpPr txBox="1"/>
           <p:nvPr/>
         </p:nvSpPr>
         <p:spPr>
           <a:xfrm>
-            <a:off x="1645919" y="1600200"/>
+            <a:off x="1508760" y="1645920"/>
             <a:ext cx="2743200" cy="822960"/>
           </a:xfrm>
           <a:prstGeom prst="rect">
@@ -3648,7 +3852,7 @@
             <a:r>
               <a:rPr sz="1800" b="1" i="0">
                 <a:solidFill>
-                  <a:srgbClr val="3A2918"/>
+                  <a:srgbClr val="493827"/>
                 </a:solidFill>
               </a:rPr>
               <a:t>올해의 한 줄</a:t>
@@ -3658,14 +3862,14 @@
       </p:sp>
       <p:sp>
         <p:nvSpPr>
-          <p:cNvPr id="7" name="TextBox 6"/>
+          <p:cNvPr id="10" name="TextBox 9"/>
           <p:cNvSpPr txBox="1"/>
           <p:nvPr/>
         </p:nvSpPr>
         <p:spPr>
           <a:xfrm>
-            <a:off x="4434840" y="1600200"/>
-            <a:ext cx="6796735" cy="822960"/>
+            <a:off x="4297680" y="1645920"/>
+            <a:ext cx="7071055" cy="822960"/>
           </a:xfrm>
           <a:prstGeom prst="rect">
             <a:avLst/>
@@ -3686,7 +3890,7 @@
             <a:r>
               <a:rPr sz="1500" b="0" i="0">
                 <a:solidFill>
-                  <a:srgbClr val="2B2B2B"/>
+                  <a:srgbClr val="26231F"/>
                 </a:solidFill>
               </a:rPr>
               <a:t>한 줄로 내용을 적어 주세요</a:t>
@@ -3696,26 +3900,26 @@
       </p:sp>
       <p:sp>
         <p:nvSpPr>
-          <p:cNvPr id="8" name="줄 2"/>
+          <p:cNvPr id="11" name="줄 2"/>
           <p:cNvSpPr/>
           <p:nvPr/>
         </p:nvSpPr>
         <p:spPr>
           <a:xfrm>
-            <a:off x="777240" y="2606039"/>
-            <a:ext cx="10637215" cy="914400"/>
+            <a:off x="640080" y="2651760"/>
+            <a:ext cx="10911535" cy="914400"/>
           </a:xfrm>
           <a:prstGeom prst="roundRect">
             <a:avLst>
-              <a:gd name="adj" fmla="val 8000"/>
+              <a:gd name="adj" fmla="val 3000"/>
             </a:avLst>
           </a:prstGeom>
           <a:solidFill>
-            <a:srgbClr val="F9F5F1"/>
+            <a:srgbClr val="FFFFFF"/>
           </a:solidFill>
-          <a:ln w="12700">
+          <a:ln w="9525">
             <a:solidFill>
-              <a:srgbClr val="EFE0D2"/>
+              <a:srgbClr val="F6E6D5"/>
             </a:solidFill>
           </a:ln>
         </p:spPr>
@@ -3729,20 +3933,51 @@
       </p:sp>
       <p:sp>
         <p:nvSpPr>
-          <p:cNvPr id="9" name="번호 2"/>
+          <p:cNvPr id="12" name="위쪽 띠"/>
           <p:cNvSpPr/>
           <p:nvPr/>
         </p:nvSpPr>
         <p:spPr>
           <a:xfrm>
-            <a:off x="960120" y="2834639"/>
-            <a:ext cx="457200" cy="457200"/>
-          </a:xfrm>
-          <a:prstGeom prst="ellipse">
+            <a:off x="649224" y="2660903"/>
+            <a:ext cx="10893247" cy="82296"/>
+          </a:xfrm>
+          <a:prstGeom prst="rect">
             <a:avLst/>
           </a:prstGeom>
           <a:solidFill>
-            <a:srgbClr val="7B5732"/>
+            <a:srgbClr val="D8A879"/>
+          </a:solidFill>
+          <a:ln>
+            <a:noFill/>
+          </a:ln>
+        </p:spPr>
+        <p:txBody>
+          <a:bodyPr rtlCol="0" anchor="ctr"/>
+          <a:lstStyle/>
+          <a:p>
+            <a:pPr algn="ctr"/>
+          </a:p>
+        </p:txBody>
+      </p:sp>
+      <p:sp>
+        <p:nvSpPr>
+          <p:cNvPr id="13" name="번호 2"/>
+          <p:cNvSpPr/>
+          <p:nvPr/>
+        </p:nvSpPr>
+        <p:spPr>
+          <a:xfrm>
+            <a:off x="822959" y="2880360"/>
+            <a:ext cx="457200" cy="457200"/>
+          </a:xfrm>
+          <a:prstGeom prst="roundRect">
+            <a:avLst>
+              <a:gd name="adj" fmla="val 25000"/>
+            </a:avLst>
+          </a:prstGeom>
+          <a:solidFill>
+            <a:srgbClr val="D8A879"/>
           </a:solidFill>
           <a:ln>
             <a:noFill/>
@@ -3762,7 +3997,7 @@
             <a:r>
               <a:rPr sz="1600" b="1" i="0">
                 <a:solidFill>
-                  <a:srgbClr val="FFFFFF"/>
+                  <a:srgbClr val="26231F"/>
                 </a:solidFill>
               </a:rPr>
               <a:t>2</a:t>
@@ -3772,13 +4007,13 @@
       </p:sp>
       <p:sp>
         <p:nvSpPr>
-          <p:cNvPr id="10" name="TextBox 9"/>
+          <p:cNvPr id="14" name="TextBox 13"/>
           <p:cNvSpPr txBox="1"/>
           <p:nvPr/>
         </p:nvSpPr>
         <p:spPr>
           <a:xfrm>
-            <a:off x="1645919" y="2651759"/>
+            <a:off x="1508760" y="2697479"/>
             <a:ext cx="2743200" cy="822960"/>
           </a:xfrm>
           <a:prstGeom prst="rect">
@@ -3800,7 +4035,7 @@
             <a:r>
               <a:rPr sz="1800" b="1" i="0">
                 <a:solidFill>
-                  <a:srgbClr val="3A2918"/>
+                  <a:srgbClr val="493827"/>
                 </a:solidFill>
               </a:rPr>
               <a:t>잘한 일</a:t>
@@ -3810,14 +4045,14 @@
       </p:sp>
       <p:sp>
         <p:nvSpPr>
-          <p:cNvPr id="11" name="TextBox 10"/>
+          <p:cNvPr id="15" name="TextBox 14"/>
           <p:cNvSpPr txBox="1"/>
           <p:nvPr/>
         </p:nvSpPr>
         <p:spPr>
           <a:xfrm>
-            <a:off x="4434840" y="2651759"/>
-            <a:ext cx="6796735" cy="822960"/>
+            <a:off x="4297680" y="2697479"/>
+            <a:ext cx="7071055" cy="822960"/>
           </a:xfrm>
           <a:prstGeom prst="rect">
             <a:avLst/>
@@ -3838,7 +4073,7 @@
             <a:r>
               <a:rPr sz="1500" b="0" i="0">
                 <a:solidFill>
-                  <a:srgbClr val="2B2B2B"/>
+                  <a:srgbClr val="26231F"/>
                 </a:solidFill>
               </a:rPr>
               <a:t>한 줄로 내용을 적어 주세요</a:t>
@@ -3848,26 +4083,26 @@
       </p:sp>
       <p:sp>
         <p:nvSpPr>
-          <p:cNvPr id="12" name="줄 3"/>
+          <p:cNvPr id="16" name="줄 3"/>
           <p:cNvSpPr/>
           <p:nvPr/>
         </p:nvSpPr>
         <p:spPr>
           <a:xfrm>
-            <a:off x="777240" y="3657600"/>
-            <a:ext cx="10637215" cy="914400"/>
+            <a:off x="640080" y="3703320"/>
+            <a:ext cx="10911535" cy="914400"/>
           </a:xfrm>
           <a:prstGeom prst="roundRect">
             <a:avLst>
-              <a:gd name="adj" fmla="val 8000"/>
+              <a:gd name="adj" fmla="val 3000"/>
             </a:avLst>
           </a:prstGeom>
           <a:solidFill>
-            <a:srgbClr val="F9F5F1"/>
+            <a:srgbClr val="FFFFFF"/>
           </a:solidFill>
-          <a:ln w="12700">
+          <a:ln w="9525">
             <a:solidFill>
-              <a:srgbClr val="EFE0D2"/>
+              <a:srgbClr val="F6E6D5"/>
             </a:solidFill>
           </a:ln>
         </p:spPr>
@@ -3881,20 +4116,51 @@
       </p:sp>
       <p:sp>
         <p:nvSpPr>
-          <p:cNvPr id="13" name="번호 3"/>
+          <p:cNvPr id="17" name="위쪽 띠"/>
           <p:cNvSpPr/>
           <p:nvPr/>
         </p:nvSpPr>
         <p:spPr>
           <a:xfrm>
-            <a:off x="960120" y="3886200"/>
-            <a:ext cx="457200" cy="457200"/>
-          </a:xfrm>
-          <a:prstGeom prst="ellipse">
+            <a:off x="649224" y="3712463"/>
+            <a:ext cx="10893247" cy="82296"/>
+          </a:xfrm>
+          <a:prstGeom prst="rect">
             <a:avLst/>
           </a:prstGeom>
           <a:solidFill>
-            <a:srgbClr val="7B5732"/>
+            <a:srgbClr val="D8A879"/>
+          </a:solidFill>
+          <a:ln>
+            <a:noFill/>
+          </a:ln>
+        </p:spPr>
+        <p:txBody>
+          <a:bodyPr rtlCol="0" anchor="ctr"/>
+          <a:lstStyle/>
+          <a:p>
+            <a:pPr algn="ctr"/>
+          </a:p>
+        </p:txBody>
+      </p:sp>
+      <p:sp>
+        <p:nvSpPr>
+          <p:cNvPr id="18" name="번호 3"/>
+          <p:cNvSpPr/>
+          <p:nvPr/>
+        </p:nvSpPr>
+        <p:spPr>
+          <a:xfrm>
+            <a:off x="822959" y="3931920"/>
+            <a:ext cx="457200" cy="457200"/>
+          </a:xfrm>
+          <a:prstGeom prst="roundRect">
+            <a:avLst>
+              <a:gd name="adj" fmla="val 25000"/>
+            </a:avLst>
+          </a:prstGeom>
+          <a:solidFill>
+            <a:srgbClr val="D8A879"/>
           </a:solidFill>
           <a:ln>
             <a:noFill/>
@@ -3914,7 +4180,7 @@
             <a:r>
               <a:rPr sz="1600" b="1" i="0">
                 <a:solidFill>
-                  <a:srgbClr val="FFFFFF"/>
+                  <a:srgbClr val="26231F"/>
                 </a:solidFill>
               </a:rPr>
               <a:t>3</a:t>
@@ -3924,13 +4190,13 @@
       </p:sp>
       <p:sp>
         <p:nvSpPr>
-          <p:cNvPr id="14" name="TextBox 13"/>
+          <p:cNvPr id="19" name="TextBox 18"/>
           <p:cNvSpPr txBox="1"/>
           <p:nvPr/>
         </p:nvSpPr>
         <p:spPr>
           <a:xfrm>
-            <a:off x="1645919" y="3703320"/>
+            <a:off x="1508760" y="3749039"/>
             <a:ext cx="2743200" cy="822960"/>
           </a:xfrm>
           <a:prstGeom prst="rect">
@@ -3952,7 +4218,7 @@
             <a:r>
               <a:rPr sz="1800" b="1" i="0">
                 <a:solidFill>
-                  <a:srgbClr val="3A2918"/>
+                  <a:srgbClr val="493827"/>
                 </a:solidFill>
               </a:rPr>
               <a:t>아쉬운 일</a:t>
@@ -3962,14 +4228,14 @@
       </p:sp>
       <p:sp>
         <p:nvSpPr>
-          <p:cNvPr id="15" name="TextBox 14"/>
+          <p:cNvPr id="20" name="TextBox 19"/>
           <p:cNvSpPr txBox="1"/>
           <p:nvPr/>
         </p:nvSpPr>
         <p:spPr>
           <a:xfrm>
-            <a:off x="4434840" y="3703320"/>
-            <a:ext cx="6796735" cy="822960"/>
+            <a:off x="4297680" y="3749039"/>
+            <a:ext cx="7071055" cy="822960"/>
           </a:xfrm>
           <a:prstGeom prst="rect">
             <a:avLst/>
@@ -3990,7 +4256,7 @@
             <a:r>
               <a:rPr sz="1500" b="0" i="0">
                 <a:solidFill>
-                  <a:srgbClr val="2B2B2B"/>
+                  <a:srgbClr val="26231F"/>
                 </a:solidFill>
               </a:rPr>
               <a:t>한 줄로 내용을 적어 주세요</a:t>
@@ -4000,26 +4266,26 @@
       </p:sp>
       <p:sp>
         <p:nvSpPr>
-          <p:cNvPr id="16" name="줄 4"/>
+          <p:cNvPr id="21" name="줄 4"/>
           <p:cNvSpPr/>
           <p:nvPr/>
         </p:nvSpPr>
         <p:spPr>
           <a:xfrm>
-            <a:off x="777240" y="4709159"/>
-            <a:ext cx="10637215" cy="914400"/>
+            <a:off x="640080" y="4754879"/>
+            <a:ext cx="10911535" cy="914400"/>
           </a:xfrm>
           <a:prstGeom prst="roundRect">
             <a:avLst>
-              <a:gd name="adj" fmla="val 8000"/>
+              <a:gd name="adj" fmla="val 3000"/>
             </a:avLst>
           </a:prstGeom>
           <a:solidFill>
-            <a:srgbClr val="F9F5F1"/>
+            <a:srgbClr val="FFFFFF"/>
           </a:solidFill>
-          <a:ln w="12700">
+          <a:ln w="9525">
             <a:solidFill>
-              <a:srgbClr val="EFE0D2"/>
+              <a:srgbClr val="F6E6D5"/>
             </a:solidFill>
           </a:ln>
         </p:spPr>
@@ -4033,20 +4299,51 @@
       </p:sp>
       <p:sp>
         <p:nvSpPr>
-          <p:cNvPr id="17" name="번호 4"/>
+          <p:cNvPr id="22" name="위쪽 띠"/>
           <p:cNvSpPr/>
           <p:nvPr/>
         </p:nvSpPr>
         <p:spPr>
           <a:xfrm>
-            <a:off x="960120" y="4937759"/>
-            <a:ext cx="457200" cy="457200"/>
-          </a:xfrm>
-          <a:prstGeom prst="ellipse">
+            <a:off x="649224" y="4764023"/>
+            <a:ext cx="10893247" cy="82296"/>
+          </a:xfrm>
+          <a:prstGeom prst="rect">
             <a:avLst/>
           </a:prstGeom>
           <a:solidFill>
-            <a:srgbClr val="7B5732"/>
+            <a:srgbClr val="D8A879"/>
+          </a:solidFill>
+          <a:ln>
+            <a:noFill/>
+          </a:ln>
+        </p:spPr>
+        <p:txBody>
+          <a:bodyPr rtlCol="0" anchor="ctr"/>
+          <a:lstStyle/>
+          <a:p>
+            <a:pPr algn="ctr"/>
+          </a:p>
+        </p:txBody>
+      </p:sp>
+      <p:sp>
+        <p:nvSpPr>
+          <p:cNvPr id="23" name="번호 4"/>
+          <p:cNvSpPr/>
+          <p:nvPr/>
+        </p:nvSpPr>
+        <p:spPr>
+          <a:xfrm>
+            <a:off x="822959" y="4983479"/>
+            <a:ext cx="457200" cy="457200"/>
+          </a:xfrm>
+          <a:prstGeom prst="roundRect">
+            <a:avLst>
+              <a:gd name="adj" fmla="val 25000"/>
+            </a:avLst>
+          </a:prstGeom>
+          <a:solidFill>
+            <a:srgbClr val="D8A879"/>
           </a:solidFill>
           <a:ln>
             <a:noFill/>
@@ -4066,7 +4363,7 @@
             <a:r>
               <a:rPr sz="1600" b="1" i="0">
                 <a:solidFill>
-                  <a:srgbClr val="FFFFFF"/>
+                  <a:srgbClr val="26231F"/>
                 </a:solidFill>
               </a:rPr>
               <a:t>4</a:t>
@@ -4076,13 +4373,13 @@
       </p:sp>
       <p:sp>
         <p:nvSpPr>
-          <p:cNvPr id="18" name="TextBox 17"/>
+          <p:cNvPr id="24" name="TextBox 23"/>
           <p:cNvSpPr txBox="1"/>
           <p:nvPr/>
         </p:nvSpPr>
         <p:spPr>
           <a:xfrm>
-            <a:off x="1645919" y="4754879"/>
+            <a:off x="1508760" y="4800599"/>
             <a:ext cx="2743200" cy="822960"/>
           </a:xfrm>
           <a:prstGeom prst="rect">
@@ -4104,7 +4401,7 @@
             <a:r>
               <a:rPr sz="1800" b="1" i="0">
                 <a:solidFill>
-                  <a:srgbClr val="3A2918"/>
+                  <a:srgbClr val="493827"/>
                 </a:solidFill>
               </a:rPr>
               <a:t>내년의 다짐</a:t>
@@ -4114,14 +4411,14 @@
       </p:sp>
       <p:sp>
         <p:nvSpPr>
-          <p:cNvPr id="19" name="TextBox 18"/>
+          <p:cNvPr id="25" name="TextBox 24"/>
           <p:cNvSpPr txBox="1"/>
           <p:nvPr/>
         </p:nvSpPr>
         <p:spPr>
           <a:xfrm>
-            <a:off x="4434840" y="4754879"/>
-            <a:ext cx="6796735" cy="822960"/>
+            <a:off x="4297680" y="4800599"/>
+            <a:ext cx="7071055" cy="822960"/>
           </a:xfrm>
           <a:prstGeom prst="rect">
             <a:avLst/>
@@ -4142,7 +4439,7 @@
             <a:r>
               <a:rPr sz="1500" b="0" i="0">
                 <a:solidFill>
-                  <a:srgbClr val="2B2B2B"/>
+                  <a:srgbClr val="26231F"/>
                 </a:solidFill>
               </a:rPr>
               <a:t>한 줄로 내용을 적어 주세요</a:t>
@@ -4164,7 +4461,7 @@
     <p:bg>
       <p:bgPr>
         <a:solidFill>
-          <a:srgbClr val="EFE0D2"/>
+          <a:srgbClr val="FBF4EC"/>
         </a:solidFill>
         <a:effectLst/>
       </p:bgPr>
@@ -4184,20 +4481,84 @@
         </p:nvSpPr>
         <p:spPr>
           <a:xfrm>
-            <a:off x="274320" y="274320"/>
-            <a:ext cx="11643055" cy="6309360"/>
+            <a:off x="640080" y="6400800"/>
+            <a:ext cx="10911535" cy="10972"/>
           </a:xfrm>
           <a:prstGeom prst="rect">
             <a:avLst/>
           </a:prstGeom>
           <a:solidFill>
-            <a:srgbClr val="FFFFFF"/>
+            <a:srgbClr val="26231F"/>
           </a:solidFill>
-          <a:ln w="25400">
-            <a:solidFill>
-              <a:srgbClr val="7B5732"/>
-            </a:solidFill>
-            <a:prstDash val="dash"/>
+          <a:ln>
+            <a:noFill/>
+          </a:ln>
+        </p:spPr>
+        <p:txBody>
+          <a:bodyPr rtlCol="0" anchor="ctr"/>
+          <a:lstStyle/>
+          <a:p>
+            <a:pPr algn="ctr"/>
+          </a:p>
+        </p:txBody>
+      </p:sp>
+      <p:sp>
+        <p:nvSpPr>
+          <p:cNvPr id="4" name="하단 라벨"/>
+          <p:cNvSpPr txBox="1"/>
+          <p:nvPr/>
+        </p:nvSpPr>
+        <p:spPr>
+          <a:xfrm>
+            <a:off x="640080" y="6437376"/>
+            <a:ext cx="5486400" cy="274320"/>
+          </a:xfrm>
+          <a:prstGeom prst="rect">
+            <a:avLst/>
+          </a:prstGeom>
+          <a:noFill/>
+        </p:spPr>
+        <p:txBody>
+          <a:bodyPr wrap="square" lIns="54864" rIns="54864" tIns="27432" bIns="27432" anchor="ctr">
+            <a:noAutofit/>
+          </a:bodyPr>
+          <a:lstStyle/>
+          <a:p>
+            <a:pPr algn="l">
+              <a:lnSpc>
+                <a:spcPct val="115000"/>
+              </a:lnSpc>
+            </a:pPr>
+            <a:r>
+              <a:rPr sz="900" b="1" i="0" spc="250">
+                <a:solidFill>
+                  <a:srgbClr val="26231F"/>
+                </a:solidFill>
+              </a:rPr>
+              <a:t>PRESENTATION</a:t>
+            </a:r>
+          </a:p>
+        </p:txBody>
+      </p:sp>
+      <p:sp>
+        <p:nvSpPr>
+          <p:cNvPr id="5" name="포인트"/>
+          <p:cNvSpPr/>
+          <p:nvPr/>
+        </p:nvSpPr>
+        <p:spPr>
+          <a:xfrm>
+            <a:off x="11213287" y="6473952"/>
+            <a:ext cx="219456" cy="219456"/>
+          </a:xfrm>
+          <a:prstGeom prst="star4">
+            <a:avLst/>
+          </a:prstGeom>
+          <a:solidFill>
+            <a:srgbClr val="D8A879"/>
+          </a:solidFill>
+          <a:ln>
+            <a:noFill/>
           </a:ln>
         </p:spPr>
         <p:txBody>
@@ -4220,8 +4581,8 @@
         </p:nvSpPr>
         <p:spPr>
           <a:xfrm>
-            <a:off x="777240" y="548640"/>
-            <a:ext cx="9357055" cy="822960"/>
+            <a:off x="640080" y="502920"/>
+            <a:ext cx="10911535" cy="914400"/>
           </a:xfrm>
         </p:spPr>
         <p:txBody>
@@ -4238,7 +4599,7 @@
             <a:r>
               <a:rPr sz="3000" b="1" i="0">
                 <a:solidFill>
-                  <a:srgbClr val="3A2918"/>
+                  <a:srgbClr val="26231F"/>
                 </a:solidFill>
               </a:rPr>
               <a:t>핵심 메시지</a:t>
@@ -4248,14 +4609,14 @@
       </p:sp>
       <p:sp>
         <p:nvSpPr>
-          <p:cNvPr id="4" name="핵심 문장"/>
+          <p:cNvPr id="6" name="핵심 문장"/>
           <p:cNvSpPr txBox="1"/>
           <p:nvPr/>
         </p:nvSpPr>
         <p:spPr>
           <a:xfrm>
-            <a:off x="777240" y="1554480"/>
-            <a:ext cx="10637215" cy="1188720"/>
+            <a:off x="640080" y="1600200"/>
+            <a:ext cx="10911535" cy="1188720"/>
           </a:xfrm>
           <a:prstGeom prst="rect">
             <a:avLst/>
@@ -4276,7 +4637,7 @@
             <a:r>
               <a:rPr sz="2600" b="1" i="0">
                 <a:solidFill>
-                  <a:srgbClr val="3A2918"/>
+                  <a:srgbClr val="493827"/>
                 </a:solidFill>
               </a:rPr>
               <a:t>한 문장으로 말하면 — 여기에 핵심 메시지를 입력하세요</a:t>
@@ -4286,26 +4647,26 @@
       </p:sp>
       <p:sp>
         <p:nvSpPr>
-          <p:cNvPr id="5" name="카드 1"/>
+          <p:cNvPr id="7" name="카드 1"/>
           <p:cNvSpPr/>
           <p:nvPr/>
         </p:nvSpPr>
         <p:spPr>
           <a:xfrm>
-            <a:off x="777240" y="3017520"/>
-            <a:ext cx="3393338" cy="3017520"/>
+            <a:off x="640080" y="3063240"/>
+            <a:ext cx="3484778" cy="3017520"/>
           </a:xfrm>
           <a:prstGeom prst="roundRect">
             <a:avLst>
-              <a:gd name="adj" fmla="val 8000"/>
+              <a:gd name="adj" fmla="val 3000"/>
             </a:avLst>
           </a:prstGeom>
           <a:solidFill>
-            <a:srgbClr val="F9F5F1"/>
+            <a:srgbClr val="FFFFFF"/>
           </a:solidFill>
-          <a:ln w="15875">
+          <a:ln w="9525">
             <a:solidFill>
-              <a:srgbClr val="EFE0D2"/>
+              <a:srgbClr val="F6E6D5"/>
             </a:solidFill>
           </a:ln>
         </p:spPr>
@@ -4319,20 +4680,51 @@
       </p:sp>
       <p:sp>
         <p:nvSpPr>
-          <p:cNvPr id="6" name="번호 1"/>
+          <p:cNvPr id="8" name="위쪽 띠"/>
           <p:cNvSpPr/>
           <p:nvPr/>
         </p:nvSpPr>
         <p:spPr>
           <a:xfrm>
-            <a:off x="960120" y="3200400"/>
-            <a:ext cx="457200" cy="457200"/>
-          </a:xfrm>
-          <a:prstGeom prst="ellipse">
+            <a:off x="649224" y="3072384"/>
+            <a:ext cx="3466490" cy="82296"/>
+          </a:xfrm>
+          <a:prstGeom prst="rect">
             <a:avLst/>
           </a:prstGeom>
           <a:solidFill>
-            <a:srgbClr val="7B5732"/>
+            <a:srgbClr val="D8A879"/>
+          </a:solidFill>
+          <a:ln>
+            <a:noFill/>
+          </a:ln>
+        </p:spPr>
+        <p:txBody>
+          <a:bodyPr rtlCol="0" anchor="ctr"/>
+          <a:lstStyle/>
+          <a:p>
+            <a:pPr algn="ctr"/>
+          </a:p>
+        </p:txBody>
+      </p:sp>
+      <p:sp>
+        <p:nvSpPr>
+          <p:cNvPr id="9" name="번호 1"/>
+          <p:cNvSpPr/>
+          <p:nvPr/>
+        </p:nvSpPr>
+        <p:spPr>
+          <a:xfrm>
+            <a:off x="822959" y="3246120"/>
+            <a:ext cx="457200" cy="457200"/>
+          </a:xfrm>
+          <a:prstGeom prst="roundRect">
+            <a:avLst>
+              <a:gd name="adj" fmla="val 25000"/>
+            </a:avLst>
+          </a:prstGeom>
+          <a:solidFill>
+            <a:srgbClr val="D8A879"/>
           </a:solidFill>
           <a:ln>
             <a:noFill/>
@@ -4352,7 +4744,7 @@
             <a:r>
               <a:rPr sz="1600" b="1" i="0">
                 <a:solidFill>
-                  <a:srgbClr val="FFFFFF"/>
+                  <a:srgbClr val="26231F"/>
                 </a:solidFill>
               </a:rPr>
               <a:t>1</a:t>
@@ -4362,14 +4754,14 @@
       </p:sp>
       <p:sp>
         <p:nvSpPr>
-          <p:cNvPr id="7" name="TextBox 6"/>
+          <p:cNvPr id="10" name="TextBox 9"/>
           <p:cNvSpPr txBox="1"/>
           <p:nvPr/>
         </p:nvSpPr>
         <p:spPr>
           <a:xfrm>
-            <a:off x="914400" y="3794760"/>
-            <a:ext cx="3119018" cy="640080"/>
+            <a:off x="777240" y="3840480"/>
+            <a:ext cx="3210458" cy="640080"/>
           </a:xfrm>
           <a:prstGeom prst="rect">
             <a:avLst/>
@@ -4390,7 +4782,7 @@
             <a:r>
               <a:rPr sz="1800" b="1" i="0">
                 <a:solidFill>
-                  <a:srgbClr val="3A2918"/>
+                  <a:srgbClr val="493827"/>
                 </a:solidFill>
               </a:rPr>
               <a:t>잘한 점</a:t>
@@ -4400,14 +4792,14 @@
       </p:sp>
       <p:sp>
         <p:nvSpPr>
-          <p:cNvPr id="8" name="TextBox 7"/>
+          <p:cNvPr id="11" name="TextBox 10"/>
           <p:cNvSpPr txBox="1"/>
           <p:nvPr/>
         </p:nvSpPr>
         <p:spPr>
           <a:xfrm>
-            <a:off x="914400" y="4480560"/>
-            <a:ext cx="3119018" cy="1417319"/>
+            <a:off x="777240" y="4526280"/>
+            <a:ext cx="3210458" cy="1417319"/>
           </a:xfrm>
           <a:prstGeom prst="rect">
             <a:avLst/>
@@ -4428,7 +4820,7 @@
             <a:r>
               <a:rPr sz="1600" b="0" i="0">
                 <a:solidFill>
-                  <a:srgbClr val="2B2B2B"/>
+                  <a:srgbClr val="26231F"/>
                 </a:solidFill>
               </a:rPr>
               <a:t>내용을 입력하세요</a:t>
@@ -4443,7 +4835,7 @@
             <a:r>
               <a:rPr sz="1600" b="0" i="0">
                 <a:solidFill>
-                  <a:srgbClr val="2B2B2B"/>
+                  <a:srgbClr val="26231F"/>
                 </a:solidFill>
               </a:rPr>
               <a:t>내용을 입력하세요</a:t>
@@ -4453,26 +4845,26 @@
       </p:sp>
       <p:sp>
         <p:nvSpPr>
-          <p:cNvPr id="9" name="카드 2"/>
+          <p:cNvPr id="12" name="카드 2"/>
           <p:cNvSpPr/>
           <p:nvPr/>
         </p:nvSpPr>
         <p:spPr>
           <a:xfrm>
-            <a:off x="4399178" y="3017520"/>
-            <a:ext cx="3393338" cy="3017520"/>
+            <a:off x="4353458" y="3063240"/>
+            <a:ext cx="3484778" cy="3017520"/>
           </a:xfrm>
           <a:prstGeom prst="roundRect">
             <a:avLst>
-              <a:gd name="adj" fmla="val 8000"/>
+              <a:gd name="adj" fmla="val 3000"/>
             </a:avLst>
           </a:prstGeom>
           <a:solidFill>
-            <a:srgbClr val="F9F5F1"/>
+            <a:srgbClr val="FFFFFF"/>
           </a:solidFill>
-          <a:ln w="15875">
+          <a:ln w="9525">
             <a:solidFill>
-              <a:srgbClr val="EFE0D2"/>
+              <a:srgbClr val="F6E6D5"/>
             </a:solidFill>
           </a:ln>
         </p:spPr>
@@ -4486,20 +4878,51 @@
       </p:sp>
       <p:sp>
         <p:nvSpPr>
-          <p:cNvPr id="10" name="번호 2"/>
+          <p:cNvPr id="13" name="위쪽 띠"/>
           <p:cNvSpPr/>
           <p:nvPr/>
         </p:nvSpPr>
         <p:spPr>
           <a:xfrm>
-            <a:off x="4582058" y="3200400"/>
-            <a:ext cx="457200" cy="457200"/>
-          </a:xfrm>
-          <a:prstGeom prst="ellipse">
+            <a:off x="4362602" y="3072384"/>
+            <a:ext cx="3466490" cy="82296"/>
+          </a:xfrm>
+          <a:prstGeom prst="rect">
             <a:avLst/>
           </a:prstGeom>
           <a:solidFill>
-            <a:srgbClr val="7B5732"/>
+            <a:srgbClr val="D8A879"/>
+          </a:solidFill>
+          <a:ln>
+            <a:noFill/>
+          </a:ln>
+        </p:spPr>
+        <p:txBody>
+          <a:bodyPr rtlCol="0" anchor="ctr"/>
+          <a:lstStyle/>
+          <a:p>
+            <a:pPr algn="ctr"/>
+          </a:p>
+        </p:txBody>
+      </p:sp>
+      <p:sp>
+        <p:nvSpPr>
+          <p:cNvPr id="14" name="번호 2"/>
+          <p:cNvSpPr/>
+          <p:nvPr/>
+        </p:nvSpPr>
+        <p:spPr>
+          <a:xfrm>
+            <a:off x="4536338" y="3246120"/>
+            <a:ext cx="457200" cy="457200"/>
+          </a:xfrm>
+          <a:prstGeom prst="roundRect">
+            <a:avLst>
+              <a:gd name="adj" fmla="val 25000"/>
+            </a:avLst>
+          </a:prstGeom>
+          <a:solidFill>
+            <a:srgbClr val="D8A879"/>
           </a:solidFill>
           <a:ln>
             <a:noFill/>
@@ -4519,7 +4942,7 @@
             <a:r>
               <a:rPr sz="1600" b="1" i="0">
                 <a:solidFill>
-                  <a:srgbClr val="FFFFFF"/>
+                  <a:srgbClr val="26231F"/>
                 </a:solidFill>
               </a:rPr>
               <a:t>2</a:t>
@@ -4529,14 +4952,14 @@
       </p:sp>
       <p:sp>
         <p:nvSpPr>
-          <p:cNvPr id="11" name="TextBox 10"/>
+          <p:cNvPr id="15" name="TextBox 14"/>
           <p:cNvSpPr txBox="1"/>
           <p:nvPr/>
         </p:nvSpPr>
         <p:spPr>
           <a:xfrm>
-            <a:off x="4536338" y="3794760"/>
-            <a:ext cx="3119018" cy="640080"/>
+            <a:off x="4490618" y="3840480"/>
+            <a:ext cx="3210458" cy="640080"/>
           </a:xfrm>
           <a:prstGeom prst="rect">
             <a:avLst/>
@@ -4557,7 +4980,7 @@
             <a:r>
               <a:rPr sz="1800" b="1" i="0">
                 <a:solidFill>
-                  <a:srgbClr val="3A2918"/>
+                  <a:srgbClr val="493827"/>
                 </a:solidFill>
               </a:rPr>
               <a:t>배운 점</a:t>
@@ -4567,14 +4990,14 @@
       </p:sp>
       <p:sp>
         <p:nvSpPr>
-          <p:cNvPr id="12" name="TextBox 11"/>
+          <p:cNvPr id="16" name="TextBox 15"/>
           <p:cNvSpPr txBox="1"/>
           <p:nvPr/>
         </p:nvSpPr>
         <p:spPr>
           <a:xfrm>
-            <a:off x="4536338" y="4480560"/>
-            <a:ext cx="3119018" cy="1417319"/>
+            <a:off x="4490618" y="4526280"/>
+            <a:ext cx="3210458" cy="1417319"/>
           </a:xfrm>
           <a:prstGeom prst="rect">
             <a:avLst/>
@@ -4595,7 +5018,7 @@
             <a:r>
               <a:rPr sz="1600" b="0" i="0">
                 <a:solidFill>
-                  <a:srgbClr val="2B2B2B"/>
+                  <a:srgbClr val="26231F"/>
                 </a:solidFill>
               </a:rPr>
               <a:t>내용을 입력하세요</a:t>
@@ -4610,7 +5033,7 @@
             <a:r>
               <a:rPr sz="1600" b="0" i="0">
                 <a:solidFill>
-                  <a:srgbClr val="2B2B2B"/>
+                  <a:srgbClr val="26231F"/>
                 </a:solidFill>
               </a:rPr>
               <a:t>내용을 입력하세요</a:t>
@@ -4620,26 +5043,26 @@
       </p:sp>
       <p:sp>
         <p:nvSpPr>
-          <p:cNvPr id="13" name="카드 3"/>
+          <p:cNvPr id="17" name="카드 3"/>
           <p:cNvSpPr/>
           <p:nvPr/>
         </p:nvSpPr>
         <p:spPr>
           <a:xfrm>
-            <a:off x="8021116" y="3017520"/>
-            <a:ext cx="3393338" cy="3017520"/>
+            <a:off x="8066836" y="3063240"/>
+            <a:ext cx="3484778" cy="3017520"/>
           </a:xfrm>
           <a:prstGeom prst="roundRect">
             <a:avLst>
-              <a:gd name="adj" fmla="val 8000"/>
+              <a:gd name="adj" fmla="val 3000"/>
             </a:avLst>
           </a:prstGeom>
           <a:solidFill>
-            <a:srgbClr val="F9F5F1"/>
+            <a:srgbClr val="FFFFFF"/>
           </a:solidFill>
-          <a:ln w="15875">
+          <a:ln w="9525">
             <a:solidFill>
-              <a:srgbClr val="EFE0D2"/>
+              <a:srgbClr val="F6E6D5"/>
             </a:solidFill>
           </a:ln>
         </p:spPr>
@@ -4653,20 +5076,51 @@
       </p:sp>
       <p:sp>
         <p:nvSpPr>
-          <p:cNvPr id="14" name="번호 3"/>
+          <p:cNvPr id="18" name="위쪽 띠"/>
           <p:cNvSpPr/>
           <p:nvPr/>
         </p:nvSpPr>
         <p:spPr>
           <a:xfrm>
-            <a:off x="8203996" y="3200400"/>
-            <a:ext cx="457200" cy="457200"/>
-          </a:xfrm>
-          <a:prstGeom prst="ellipse">
+            <a:off x="8075980" y="3072384"/>
+            <a:ext cx="3466490" cy="82296"/>
+          </a:xfrm>
+          <a:prstGeom prst="rect">
             <a:avLst/>
           </a:prstGeom>
           <a:solidFill>
-            <a:srgbClr val="7B5732"/>
+            <a:srgbClr val="D8A879"/>
+          </a:solidFill>
+          <a:ln>
+            <a:noFill/>
+          </a:ln>
+        </p:spPr>
+        <p:txBody>
+          <a:bodyPr rtlCol="0" anchor="ctr"/>
+          <a:lstStyle/>
+          <a:p>
+            <a:pPr algn="ctr"/>
+          </a:p>
+        </p:txBody>
+      </p:sp>
+      <p:sp>
+        <p:nvSpPr>
+          <p:cNvPr id="19" name="번호 3"/>
+          <p:cNvSpPr/>
+          <p:nvPr/>
+        </p:nvSpPr>
+        <p:spPr>
+          <a:xfrm>
+            <a:off x="8249716" y="3246120"/>
+            <a:ext cx="457200" cy="457200"/>
+          </a:xfrm>
+          <a:prstGeom prst="roundRect">
+            <a:avLst>
+              <a:gd name="adj" fmla="val 25000"/>
+            </a:avLst>
+          </a:prstGeom>
+          <a:solidFill>
+            <a:srgbClr val="D8A879"/>
           </a:solidFill>
           <a:ln>
             <a:noFill/>
@@ -4686,7 +5140,7 @@
             <a:r>
               <a:rPr sz="1600" b="1" i="0">
                 <a:solidFill>
-                  <a:srgbClr val="FFFFFF"/>
+                  <a:srgbClr val="26231F"/>
                 </a:solidFill>
               </a:rPr>
               <a:t>3</a:t>
@@ -4696,14 +5150,14 @@
       </p:sp>
       <p:sp>
         <p:nvSpPr>
-          <p:cNvPr id="15" name="TextBox 14"/>
+          <p:cNvPr id="20" name="TextBox 19"/>
           <p:cNvSpPr txBox="1"/>
           <p:nvPr/>
         </p:nvSpPr>
         <p:spPr>
           <a:xfrm>
-            <a:off x="8158276" y="3794760"/>
-            <a:ext cx="3119018" cy="640080"/>
+            <a:off x="8203996" y="3840480"/>
+            <a:ext cx="3210458" cy="640080"/>
           </a:xfrm>
           <a:prstGeom prst="rect">
             <a:avLst/>
@@ -4724,7 +5178,7 @@
             <a:r>
               <a:rPr sz="1800" b="1" i="0">
                 <a:solidFill>
-                  <a:srgbClr val="3A2918"/>
+                  <a:srgbClr val="493827"/>
                 </a:solidFill>
               </a:rPr>
               <a:t>다음 목표</a:t>
@@ -4734,14 +5188,14 @@
       </p:sp>
       <p:sp>
         <p:nvSpPr>
-          <p:cNvPr id="16" name="TextBox 15"/>
+          <p:cNvPr id="21" name="TextBox 20"/>
           <p:cNvSpPr txBox="1"/>
           <p:nvPr/>
         </p:nvSpPr>
         <p:spPr>
           <a:xfrm>
-            <a:off x="8158276" y="4480560"/>
-            <a:ext cx="3119018" cy="1417319"/>
+            <a:off x="8203996" y="4526280"/>
+            <a:ext cx="3210458" cy="1417319"/>
           </a:xfrm>
           <a:prstGeom prst="rect">
             <a:avLst/>
@@ -4762,7 +5216,7 @@
             <a:r>
               <a:rPr sz="1600" b="0" i="0">
                 <a:solidFill>
-                  <a:srgbClr val="2B2B2B"/>
+                  <a:srgbClr val="26231F"/>
                 </a:solidFill>
               </a:rPr>
               <a:t>내용을 입력하세요</a:t>
@@ -4777,7 +5231,7 @@
             <a:r>
               <a:rPr sz="1600" b="0" i="0">
                 <a:solidFill>
-                  <a:srgbClr val="2B2B2B"/>
+                  <a:srgbClr val="26231F"/>
                 </a:solidFill>
               </a:rPr>
               <a:t>내용을 입력하세요</a:t>
@@ -4799,7 +5253,7 @@
     <p:bg>
       <p:bgPr>
         <a:solidFill>
-          <a:srgbClr val="EFE0D2"/>
+          <a:srgbClr val="FBF4EC"/>
         </a:solidFill>
         <a:effectLst/>
       </p:bgPr>
@@ -4819,20 +5273,84 @@
         </p:nvSpPr>
         <p:spPr>
           <a:xfrm>
-            <a:off x="274320" y="274320"/>
-            <a:ext cx="11643055" cy="6309360"/>
+            <a:off x="640080" y="6400800"/>
+            <a:ext cx="10911535" cy="10972"/>
           </a:xfrm>
           <a:prstGeom prst="rect">
             <a:avLst/>
           </a:prstGeom>
           <a:solidFill>
-            <a:srgbClr val="FFFFFF"/>
+            <a:srgbClr val="26231F"/>
           </a:solidFill>
-          <a:ln w="25400">
-            <a:solidFill>
-              <a:srgbClr val="7B5732"/>
-            </a:solidFill>
-            <a:prstDash val="dash"/>
+          <a:ln>
+            <a:noFill/>
+          </a:ln>
+        </p:spPr>
+        <p:txBody>
+          <a:bodyPr rtlCol="0" anchor="ctr"/>
+          <a:lstStyle/>
+          <a:p>
+            <a:pPr algn="ctr"/>
+          </a:p>
+        </p:txBody>
+      </p:sp>
+      <p:sp>
+        <p:nvSpPr>
+          <p:cNvPr id="4" name="하단 라벨"/>
+          <p:cNvSpPr txBox="1"/>
+          <p:nvPr/>
+        </p:nvSpPr>
+        <p:spPr>
+          <a:xfrm>
+            <a:off x="640080" y="6437376"/>
+            <a:ext cx="5486400" cy="274320"/>
+          </a:xfrm>
+          <a:prstGeom prst="rect">
+            <a:avLst/>
+          </a:prstGeom>
+          <a:noFill/>
+        </p:spPr>
+        <p:txBody>
+          <a:bodyPr wrap="square" lIns="54864" rIns="54864" tIns="27432" bIns="27432" anchor="ctr">
+            <a:noAutofit/>
+          </a:bodyPr>
+          <a:lstStyle/>
+          <a:p>
+            <a:pPr algn="l">
+              <a:lnSpc>
+                <a:spcPct val="115000"/>
+              </a:lnSpc>
+            </a:pPr>
+            <a:r>
+              <a:rPr sz="900" b="1" i="0" spc="250">
+                <a:solidFill>
+                  <a:srgbClr val="26231F"/>
+                </a:solidFill>
+              </a:rPr>
+              <a:t>PRESENTATION</a:t>
+            </a:r>
+          </a:p>
+        </p:txBody>
+      </p:sp>
+      <p:sp>
+        <p:nvSpPr>
+          <p:cNvPr id="5" name="포인트"/>
+          <p:cNvSpPr/>
+          <p:nvPr/>
+        </p:nvSpPr>
+        <p:spPr>
+          <a:xfrm>
+            <a:off x="11213287" y="6473952"/>
+            <a:ext cx="219456" cy="219456"/>
+          </a:xfrm>
+          <a:prstGeom prst="star4">
+            <a:avLst/>
+          </a:prstGeom>
+          <a:solidFill>
+            <a:srgbClr val="D8A879"/>
+          </a:solidFill>
+          <a:ln>
+            <a:noFill/>
           </a:ln>
         </p:spPr>
         <p:txBody>
@@ -4855,8 +5373,8 @@
         </p:nvSpPr>
         <p:spPr>
           <a:xfrm>
-            <a:off x="777240" y="548640"/>
-            <a:ext cx="9357055" cy="822960"/>
+            <a:off x="640080" y="502920"/>
+            <a:ext cx="10911535" cy="914400"/>
           </a:xfrm>
         </p:spPr>
         <p:txBody>
@@ -4873,7 +5391,7 @@
             <a:r>
               <a:rPr sz="3000" b="1" i="0">
                 <a:solidFill>
-                  <a:srgbClr val="3A2918"/>
+                  <a:srgbClr val="26231F"/>
                 </a:solidFill>
               </a:rPr>
               <a:t>한눈에 비교</a:t>
@@ -4883,26 +5401,26 @@
       </p:sp>
       <p:sp>
         <p:nvSpPr>
-          <p:cNvPr id="4" name="왼쪽 칸"/>
+          <p:cNvPr id="6" name="왼쪽 칸"/>
           <p:cNvSpPr/>
           <p:nvPr/>
         </p:nvSpPr>
         <p:spPr>
           <a:xfrm>
-            <a:off x="777240" y="1554480"/>
-            <a:ext cx="5135727" cy="4663440"/>
+            <a:off x="640080" y="1600200"/>
+            <a:ext cx="5272887" cy="3291840"/>
           </a:xfrm>
           <a:prstGeom prst="roundRect">
             <a:avLst>
-              <a:gd name="adj" fmla="val 8000"/>
+              <a:gd name="adj" fmla="val 3000"/>
             </a:avLst>
           </a:prstGeom>
           <a:solidFill>
-            <a:srgbClr val="F9F5F1"/>
+            <a:srgbClr val="FFFFFF"/>
           </a:solidFill>
-          <a:ln w="12700">
+          <a:ln w="9525">
             <a:solidFill>
-              <a:srgbClr val="EFE0D2"/>
+              <a:srgbClr val="F6E6D5"/>
             </a:solidFill>
           </a:ln>
         </p:spPr>
@@ -4916,14 +5434,43 @@
       </p:sp>
       <p:sp>
         <p:nvSpPr>
-          <p:cNvPr id="5" name="칸 제목 바"/>
+          <p:cNvPr id="7" name="위쪽 띠"/>
           <p:cNvSpPr/>
           <p:nvPr/>
         </p:nvSpPr>
         <p:spPr>
           <a:xfrm>
-            <a:off x="777240" y="1554480"/>
-            <a:ext cx="5135727" cy="640080"/>
+            <a:off x="649224" y="1609344"/>
+            <a:ext cx="5254599" cy="82296"/>
+          </a:xfrm>
+          <a:prstGeom prst="rect">
+            <a:avLst/>
+          </a:prstGeom>
+          <a:solidFill>
+            <a:srgbClr val="D8A879"/>
+          </a:solidFill>
+          <a:ln>
+            <a:noFill/>
+          </a:ln>
+        </p:spPr>
+        <p:txBody>
+          <a:bodyPr rtlCol="0" anchor="ctr"/>
+          <a:lstStyle/>
+          <a:p>
+            <a:pPr algn="ctr"/>
+          </a:p>
+        </p:txBody>
+      </p:sp>
+      <p:sp>
+        <p:nvSpPr>
+          <p:cNvPr id="8" name="칸 제목 바"/>
+          <p:cNvSpPr/>
+          <p:nvPr/>
+        </p:nvSpPr>
+        <p:spPr>
+          <a:xfrm>
+            <a:off x="640080" y="1600200"/>
+            <a:ext cx="5272887" cy="640080"/>
           </a:xfrm>
           <a:prstGeom prst="roundRect">
             <a:avLst>
@@ -4931,7 +5478,7 @@
             </a:avLst>
           </a:prstGeom>
           <a:solidFill>
-            <a:srgbClr val="7B5732"/>
+            <a:srgbClr val="D8A879"/>
           </a:solidFill>
           <a:ln>
             <a:noFill/>
@@ -4947,14 +5494,14 @@
       </p:sp>
       <p:sp>
         <p:nvSpPr>
-          <p:cNvPr id="6" name="TextBox 5"/>
+          <p:cNvPr id="9" name="TextBox 8"/>
           <p:cNvSpPr txBox="1"/>
           <p:nvPr/>
         </p:nvSpPr>
         <p:spPr>
           <a:xfrm>
-            <a:off x="960120" y="1554480"/>
-            <a:ext cx="4769967" cy="640080"/>
+            <a:off x="822959" y="1600200"/>
+            <a:ext cx="4907127" cy="640080"/>
           </a:xfrm>
           <a:prstGeom prst="rect">
             <a:avLst/>
@@ -4975,7 +5522,7 @@
             <a:r>
               <a:rPr sz="1800" b="1" i="0">
                 <a:solidFill>
-                  <a:srgbClr val="FFFFFF"/>
+                  <a:srgbClr val="26231F"/>
                 </a:solidFill>
               </a:rPr>
               <a:t>올해 초</a:t>
@@ -4985,14 +5532,14 @@
       </p:sp>
       <p:sp>
         <p:nvSpPr>
-          <p:cNvPr id="7" name="TextBox 6"/>
+          <p:cNvPr id="10" name="TextBox 9"/>
           <p:cNvSpPr txBox="1"/>
           <p:nvPr/>
         </p:nvSpPr>
         <p:spPr>
           <a:xfrm>
-            <a:off x="1005840" y="2377440"/>
-            <a:ext cx="4678527" cy="3749039"/>
+            <a:off x="868680" y="2423160"/>
+            <a:ext cx="4815687" cy="2377440"/>
           </a:xfrm>
           <a:prstGeom prst="rect">
             <a:avLst/>
@@ -5018,7 +5565,7 @@
             <a:r>
               <a:rPr sz="1500" b="0" i="0">
                 <a:solidFill>
-                  <a:srgbClr val="2B2B2B"/>
+                  <a:srgbClr val="26231F"/>
                 </a:solidFill>
               </a:rPr>
               <a:t>내용을 입력하세요</a:t>
@@ -5038,7 +5585,7 @@
             <a:r>
               <a:rPr sz="1500" b="0" i="0">
                 <a:solidFill>
-                  <a:srgbClr val="2B2B2B"/>
+                  <a:srgbClr val="26231F"/>
                 </a:solidFill>
               </a:rPr>
               <a:t>내용을 입력하세요</a:t>
@@ -5058,7 +5605,7 @@
             <a:r>
               <a:rPr sz="1500" b="0" i="0">
                 <a:solidFill>
-                  <a:srgbClr val="2B2B2B"/>
+                  <a:srgbClr val="26231F"/>
                 </a:solidFill>
               </a:rPr>
               <a:t>내용을 입력하세요</a:t>
@@ -5068,26 +5615,26 @@
       </p:sp>
       <p:sp>
         <p:nvSpPr>
-          <p:cNvPr id="8" name="오른쪽 칸"/>
+          <p:cNvPr id="11" name="오른쪽 칸"/>
           <p:cNvSpPr/>
           <p:nvPr/>
         </p:nvSpPr>
         <p:spPr>
           <a:xfrm>
-            <a:off x="6278727" y="1554480"/>
-            <a:ext cx="5135727" cy="4663440"/>
+            <a:off x="6278727" y="1600200"/>
+            <a:ext cx="5272887" cy="3291840"/>
           </a:xfrm>
           <a:prstGeom prst="roundRect">
             <a:avLst>
-              <a:gd name="adj" fmla="val 8000"/>
+              <a:gd name="adj" fmla="val 3000"/>
             </a:avLst>
           </a:prstGeom>
           <a:solidFill>
-            <a:srgbClr val="EFE0D2"/>
+            <a:srgbClr val="FFFFFF"/>
           </a:solidFill>
-          <a:ln w="12700">
+          <a:ln w="9525">
             <a:solidFill>
-              <a:srgbClr val="EFE0D2"/>
+              <a:srgbClr val="F6E6D5"/>
             </a:solidFill>
           </a:ln>
         </p:spPr>
@@ -5101,14 +5648,43 @@
       </p:sp>
       <p:sp>
         <p:nvSpPr>
-          <p:cNvPr id="9" name="칸 제목 바"/>
+          <p:cNvPr id="12" name="위쪽 띠"/>
           <p:cNvSpPr/>
           <p:nvPr/>
         </p:nvSpPr>
         <p:spPr>
           <a:xfrm>
-            <a:off x="6278727" y="1554480"/>
-            <a:ext cx="5135727" cy="640080"/>
+            <a:off x="6287871" y="1609344"/>
+            <a:ext cx="5254599" cy="82296"/>
+          </a:xfrm>
+          <a:prstGeom prst="rect">
+            <a:avLst/>
+          </a:prstGeom>
+          <a:solidFill>
+            <a:srgbClr val="D8A879"/>
+          </a:solidFill>
+          <a:ln>
+            <a:noFill/>
+          </a:ln>
+        </p:spPr>
+        <p:txBody>
+          <a:bodyPr rtlCol="0" anchor="ctr"/>
+          <a:lstStyle/>
+          <a:p>
+            <a:pPr algn="ctr"/>
+          </a:p>
+        </p:txBody>
+      </p:sp>
+      <p:sp>
+        <p:nvSpPr>
+          <p:cNvPr id="13" name="칸 제목 바"/>
+          <p:cNvSpPr/>
+          <p:nvPr/>
+        </p:nvSpPr>
+        <p:spPr>
+          <a:xfrm>
+            <a:off x="6278727" y="1600200"/>
+            <a:ext cx="5272887" cy="640080"/>
           </a:xfrm>
           <a:prstGeom prst="roundRect">
             <a:avLst>
@@ -5116,7 +5692,7 @@
             </a:avLst>
           </a:prstGeom>
           <a:solidFill>
-            <a:srgbClr val="3A2918"/>
+            <a:srgbClr val="493827"/>
           </a:solidFill>
           <a:ln>
             <a:noFill/>
@@ -5132,14 +5708,14 @@
       </p:sp>
       <p:sp>
         <p:nvSpPr>
-          <p:cNvPr id="10" name="TextBox 9"/>
+          <p:cNvPr id="14" name="TextBox 13"/>
           <p:cNvSpPr txBox="1"/>
           <p:nvPr/>
         </p:nvSpPr>
         <p:spPr>
           <a:xfrm>
-            <a:off x="6461607" y="1554480"/>
-            <a:ext cx="4769967" cy="640080"/>
+            <a:off x="6461607" y="1600200"/>
+            <a:ext cx="4907127" cy="640080"/>
           </a:xfrm>
           <a:prstGeom prst="rect">
             <a:avLst/>
@@ -5170,14 +5746,14 @@
       </p:sp>
       <p:sp>
         <p:nvSpPr>
-          <p:cNvPr id="11" name="TextBox 10"/>
+          <p:cNvPr id="15" name="TextBox 14"/>
           <p:cNvSpPr txBox="1"/>
           <p:nvPr/>
         </p:nvSpPr>
         <p:spPr>
           <a:xfrm>
-            <a:off x="6507327" y="2377440"/>
-            <a:ext cx="4678527" cy="3749039"/>
+            <a:off x="6507327" y="2423160"/>
+            <a:ext cx="4815687" cy="2377440"/>
           </a:xfrm>
           <a:prstGeom prst="rect">
             <a:avLst/>
@@ -5203,7 +5779,7 @@
             <a:r>
               <a:rPr sz="1500" b="0" i="0">
                 <a:solidFill>
-                  <a:srgbClr val="2B2B2B"/>
+                  <a:srgbClr val="26231F"/>
                 </a:solidFill>
               </a:rPr>
               <a:t>내용을 입력하세요</a:t>
@@ -5223,7 +5799,7 @@
             <a:r>
               <a:rPr sz="1500" b="0" i="0">
                 <a:solidFill>
-                  <a:srgbClr val="2B2B2B"/>
+                  <a:srgbClr val="26231F"/>
                 </a:solidFill>
               </a:rPr>
               <a:t>내용을 입력하세요</a:t>
@@ -5243,7 +5819,7 @@
             <a:r>
               <a:rPr sz="1500" b="0" i="0">
                 <a:solidFill>
-                  <a:srgbClr val="2B2B2B"/>
+                  <a:srgbClr val="26231F"/>
                 </a:solidFill>
               </a:rPr>
               <a:t>내용을 입력하세요</a:t>
@@ -5265,7 +5841,7 @@
     <p:bg>
       <p:bgPr>
         <a:solidFill>
-          <a:srgbClr val="EFE0D2"/>
+          <a:srgbClr val="FBF4EC"/>
         </a:solidFill>
         <a:effectLst/>
       </p:bgPr>
@@ -5285,20 +5861,84 @@
         </p:nvSpPr>
         <p:spPr>
           <a:xfrm>
-            <a:off x="274320" y="274320"/>
-            <a:ext cx="11643055" cy="6309360"/>
+            <a:off x="640080" y="6400800"/>
+            <a:ext cx="10911535" cy="10972"/>
           </a:xfrm>
           <a:prstGeom prst="rect">
             <a:avLst/>
           </a:prstGeom>
           <a:solidFill>
-            <a:srgbClr val="FFFFFF"/>
+            <a:srgbClr val="26231F"/>
           </a:solidFill>
-          <a:ln w="25400">
-            <a:solidFill>
-              <a:srgbClr val="7B5732"/>
-            </a:solidFill>
-            <a:prstDash val="dash"/>
+          <a:ln>
+            <a:noFill/>
+          </a:ln>
+        </p:spPr>
+        <p:txBody>
+          <a:bodyPr rtlCol="0" anchor="ctr"/>
+          <a:lstStyle/>
+          <a:p>
+            <a:pPr algn="ctr"/>
+          </a:p>
+        </p:txBody>
+      </p:sp>
+      <p:sp>
+        <p:nvSpPr>
+          <p:cNvPr id="4" name="하단 라벨"/>
+          <p:cNvSpPr txBox="1"/>
+          <p:nvPr/>
+        </p:nvSpPr>
+        <p:spPr>
+          <a:xfrm>
+            <a:off x="640080" y="6437376"/>
+            <a:ext cx="5486400" cy="274320"/>
+          </a:xfrm>
+          <a:prstGeom prst="rect">
+            <a:avLst/>
+          </a:prstGeom>
+          <a:noFill/>
+        </p:spPr>
+        <p:txBody>
+          <a:bodyPr wrap="square" lIns="54864" rIns="54864" tIns="27432" bIns="27432" anchor="ctr">
+            <a:noAutofit/>
+          </a:bodyPr>
+          <a:lstStyle/>
+          <a:p>
+            <a:pPr algn="l">
+              <a:lnSpc>
+                <a:spcPct val="115000"/>
+              </a:lnSpc>
+            </a:pPr>
+            <a:r>
+              <a:rPr sz="900" b="1" i="0" spc="250">
+                <a:solidFill>
+                  <a:srgbClr val="26231F"/>
+                </a:solidFill>
+              </a:rPr>
+              <a:t>PRESENTATION</a:t>
+            </a:r>
+          </a:p>
+        </p:txBody>
+      </p:sp>
+      <p:sp>
+        <p:nvSpPr>
+          <p:cNvPr id="5" name="포인트"/>
+          <p:cNvSpPr/>
+          <p:nvPr/>
+        </p:nvSpPr>
+        <p:spPr>
+          <a:xfrm>
+            <a:off x="11213287" y="6473952"/>
+            <a:ext cx="219456" cy="219456"/>
+          </a:xfrm>
+          <a:prstGeom prst="star4">
+            <a:avLst/>
+          </a:prstGeom>
+          <a:solidFill>
+            <a:srgbClr val="D8A879"/>
+          </a:solidFill>
+          <a:ln>
+            <a:noFill/>
           </a:ln>
         </p:spPr>
         <p:txBody>
@@ -5321,8 +5961,8 @@
         </p:nvSpPr>
         <p:spPr>
           <a:xfrm>
-            <a:off x="777240" y="548640"/>
-            <a:ext cx="9357055" cy="822960"/>
+            <a:off x="640080" y="502920"/>
+            <a:ext cx="10911535" cy="914400"/>
           </a:xfrm>
         </p:spPr>
         <p:txBody>
@@ -5339,7 +5979,7 @@
             <a:r>
               <a:rPr sz="3000" b="1" i="0">
                 <a:solidFill>
-                  <a:srgbClr val="3A2918"/>
+                  <a:srgbClr val="26231F"/>
                 </a:solidFill>
               </a:rPr>
               <a:t>일정·현황</a:t>
@@ -5349,15 +5989,15 @@
       </p:sp>
       <p:graphicFrame>
         <p:nvGraphicFramePr>
-          <p:cNvPr id="4" name="표"/>
+          <p:cNvPr id="6" name="표"/>
           <p:cNvGraphicFramePr>
             <a:graphicFrameLocks noGrp="1"/>
           </p:cNvGraphicFramePr>
           <p:nvPr/>
         </p:nvGraphicFramePr>
         <p:xfrm>
-          <a:off x="777240" y="1554480"/>
-          <a:ext cx="10637212" cy="3840480"/>
+          <a:off x="640080" y="1600200"/>
+          <a:ext cx="10911532" cy="3840480"/>
         </p:xfrm>
         <a:graphic>
           <a:graphicData uri="http://schemas.openxmlformats.org/drawingml/2006/table">
@@ -5366,10 +6006,10 @@
                 <a:tableStyleId>{5C22544A-7EE6-4342-B048-85BDC9FD1C3A}</a:tableStyleId>
               </a:tblPr>
               <a:tblGrid>
-                <a:gridCol w="2659303"/>
-                <a:gridCol w="2659303"/>
-                <a:gridCol w="2659303"/>
-                <a:gridCol w="2659303"/>
+                <a:gridCol w="2727883"/>
+                <a:gridCol w="2727883"/>
+                <a:gridCol w="2727883"/>
+                <a:gridCol w="2727883"/>
               </a:tblGrid>
               <a:tr h="640080">
                 <a:tc>
@@ -5381,7 +6021,7 @@
                       <a:r>
                         <a:rPr sz="1500" b="1">
                           <a:solidFill>
-                            <a:srgbClr val="FFFFFF"/>
+                            <a:srgbClr val="26231F"/>
                           </a:solidFill>
                         </a:rPr>
                         <a:t>월</a:t>
@@ -5391,30 +6031,30 @@
                   <a:tcPr anchor="ctr" marL="73152" marR="73152">
                     <a:lnL w="9525" cap="flat" cmpd="sng" algn="ctr">
                       <a:solidFill>
-                        <a:srgbClr val="7B5732"/>
+                        <a:srgbClr val="D8A879"/>
                       </a:solidFill>
                       <a:prstDash val="solid"/>
                     </a:lnL>
                     <a:lnR w="9525" cap="flat" cmpd="sng" algn="ctr">
                       <a:solidFill>
-                        <a:srgbClr val="7B5732"/>
+                        <a:srgbClr val="D8A879"/>
                       </a:solidFill>
                       <a:prstDash val="solid"/>
                     </a:lnR>
                     <a:lnT w="9525" cap="flat" cmpd="sng" algn="ctr">
                       <a:solidFill>
-                        <a:srgbClr val="7B5732"/>
+                        <a:srgbClr val="D8A879"/>
                       </a:solidFill>
                       <a:prstDash val="solid"/>
                     </a:lnT>
                     <a:lnB w="9525" cap="flat" cmpd="sng" algn="ctr">
                       <a:solidFill>
-                        <a:srgbClr val="7B5732"/>
+                        <a:srgbClr val="D8A879"/>
                       </a:solidFill>
                       <a:prstDash val="solid"/>
                     </a:lnB>
                     <a:solidFill>
-                      <a:srgbClr val="7B5732"/>
+                      <a:srgbClr val="D8A879"/>
                     </a:solidFill>
                   </a:tcPr>
                 </a:tc>
@@ -5427,7 +6067,7 @@
                       <a:r>
                         <a:rPr sz="1500" b="1">
                           <a:solidFill>
-                            <a:srgbClr val="FFFFFF"/>
+                            <a:srgbClr val="26231F"/>
                           </a:solidFill>
                         </a:rPr>
                         <a:t>한 일</a:t>
@@ -5437,30 +6077,30 @@
                   <a:tcPr anchor="ctr" marL="73152" marR="73152">
                     <a:lnL w="9525" cap="flat" cmpd="sng" algn="ctr">
                       <a:solidFill>
-                        <a:srgbClr val="7B5732"/>
+                        <a:srgbClr val="D8A879"/>
                       </a:solidFill>
                       <a:prstDash val="solid"/>
                     </a:lnL>
                     <a:lnR w="9525" cap="flat" cmpd="sng" algn="ctr">
                       <a:solidFill>
-                        <a:srgbClr val="7B5732"/>
+                        <a:srgbClr val="D8A879"/>
                       </a:solidFill>
                       <a:prstDash val="solid"/>
                     </a:lnR>
                     <a:lnT w="9525" cap="flat" cmpd="sng" algn="ctr">
                       <a:solidFill>
-                        <a:srgbClr val="7B5732"/>
+                        <a:srgbClr val="D8A879"/>
                       </a:solidFill>
                       <a:prstDash val="solid"/>
                     </a:lnT>
                     <a:lnB w="9525" cap="flat" cmpd="sng" algn="ctr">
                       <a:solidFill>
-                        <a:srgbClr val="7B5732"/>
+                        <a:srgbClr val="D8A879"/>
                       </a:solidFill>
                       <a:prstDash val="solid"/>
                     </a:lnB>
                     <a:solidFill>
-                      <a:srgbClr val="7B5732"/>
+                      <a:srgbClr val="D8A879"/>
                     </a:solidFill>
                   </a:tcPr>
                 </a:tc>
@@ -5473,7 +6113,7 @@
                       <a:r>
                         <a:rPr sz="1500" b="1">
                           <a:solidFill>
-                            <a:srgbClr val="FFFFFF"/>
+                            <a:srgbClr val="26231F"/>
                           </a:solidFill>
                         </a:rPr>
                         <a:t>배운 점</a:t>
@@ -5483,30 +6123,30 @@
                   <a:tcPr anchor="ctr" marL="73152" marR="73152">
                     <a:lnL w="9525" cap="flat" cmpd="sng" algn="ctr">
                       <a:solidFill>
-                        <a:srgbClr val="7B5732"/>
+                        <a:srgbClr val="D8A879"/>
                       </a:solidFill>
                       <a:prstDash val="solid"/>
                     </a:lnL>
                     <a:lnR w="9525" cap="flat" cmpd="sng" algn="ctr">
                       <a:solidFill>
-                        <a:srgbClr val="7B5732"/>
+                        <a:srgbClr val="D8A879"/>
                       </a:solidFill>
                       <a:prstDash val="solid"/>
                     </a:lnR>
                     <a:lnT w="9525" cap="flat" cmpd="sng" algn="ctr">
                       <a:solidFill>
-                        <a:srgbClr val="7B5732"/>
+                        <a:srgbClr val="D8A879"/>
                       </a:solidFill>
                       <a:prstDash val="solid"/>
                     </a:lnT>
                     <a:lnB w="9525" cap="flat" cmpd="sng" algn="ctr">
                       <a:solidFill>
-                        <a:srgbClr val="7B5732"/>
+                        <a:srgbClr val="D8A879"/>
                       </a:solidFill>
                       <a:prstDash val="solid"/>
                     </a:lnB>
                     <a:solidFill>
-                      <a:srgbClr val="7B5732"/>
+                      <a:srgbClr val="D8A879"/>
                     </a:solidFill>
                   </a:tcPr>
                 </a:tc>
@@ -5519,7 +6159,7 @@
                       <a:r>
                         <a:rPr sz="1500" b="1">
                           <a:solidFill>
-                            <a:srgbClr val="FFFFFF"/>
+                            <a:srgbClr val="26231F"/>
                           </a:solidFill>
                         </a:rPr>
                         <a:t>점수</a:t>
@@ -5529,30 +6169,30 @@
                   <a:tcPr anchor="ctr" marL="73152" marR="73152">
                     <a:lnL w="9525" cap="flat" cmpd="sng" algn="ctr">
                       <a:solidFill>
-                        <a:srgbClr val="7B5732"/>
+                        <a:srgbClr val="D8A879"/>
                       </a:solidFill>
                       <a:prstDash val="solid"/>
                     </a:lnL>
                     <a:lnR w="9525" cap="flat" cmpd="sng" algn="ctr">
                       <a:solidFill>
-                        <a:srgbClr val="7B5732"/>
+                        <a:srgbClr val="D8A879"/>
                       </a:solidFill>
                       <a:prstDash val="solid"/>
                     </a:lnR>
                     <a:lnT w="9525" cap="flat" cmpd="sng" algn="ctr">
                       <a:solidFill>
-                        <a:srgbClr val="7B5732"/>
+                        <a:srgbClr val="D8A879"/>
                       </a:solidFill>
                       <a:prstDash val="solid"/>
                     </a:lnT>
                     <a:lnB w="9525" cap="flat" cmpd="sng" algn="ctr">
                       <a:solidFill>
-                        <a:srgbClr val="7B5732"/>
+                        <a:srgbClr val="D8A879"/>
                       </a:solidFill>
                       <a:prstDash val="solid"/>
                     </a:lnB>
                     <a:solidFill>
-                      <a:srgbClr val="7B5732"/>
+                      <a:srgbClr val="D8A879"/>
                     </a:solidFill>
                   </a:tcPr>
                 </a:tc>
@@ -5567,7 +6207,7 @@
                       <a:r>
                         <a:rPr sz="1500" b="1">
                           <a:solidFill>
-                            <a:srgbClr val="3A2918"/>
+                            <a:srgbClr val="493827"/>
                           </a:solidFill>
                         </a:rPr>
                         <a:t>1</a:t>
@@ -5577,30 +6217,30 @@
                   <a:tcPr anchor="ctr" marL="73152" marR="73152">
                     <a:lnL w="9525" cap="flat" cmpd="sng" algn="ctr">
                       <a:solidFill>
-                        <a:srgbClr val="EFE0D2"/>
+                        <a:srgbClr val="F6E6D5"/>
                       </a:solidFill>
                       <a:prstDash val="solid"/>
                     </a:lnL>
                     <a:lnR w="9525" cap="flat" cmpd="sng" algn="ctr">
                       <a:solidFill>
-                        <a:srgbClr val="EFE0D2"/>
+                        <a:srgbClr val="F6E6D5"/>
                       </a:solidFill>
                       <a:prstDash val="solid"/>
                     </a:lnR>
                     <a:lnT w="9525" cap="flat" cmpd="sng" algn="ctr">
                       <a:solidFill>
-                        <a:srgbClr val="EFE0D2"/>
+                        <a:srgbClr val="F6E6D5"/>
                       </a:solidFill>
                       <a:prstDash val="solid"/>
                     </a:lnT>
                     <a:lnB w="9525" cap="flat" cmpd="sng" algn="ctr">
                       <a:solidFill>
-                        <a:srgbClr val="EFE0D2"/>
+                        <a:srgbClr val="F6E6D5"/>
                       </a:solidFill>
                       <a:prstDash val="solid"/>
                     </a:lnB>
                     <a:solidFill>
-                      <a:srgbClr val="EFE0D2"/>
+                      <a:srgbClr val="F6E6D5"/>
                     </a:solidFill>
                   </a:tcPr>
                 </a:tc>
@@ -5613,7 +6253,7 @@
                       <a:r>
                         <a:rPr sz="1500" b="0">
                           <a:solidFill>
-                            <a:srgbClr val="2B2B2B"/>
+                            <a:srgbClr val="26231F"/>
                           </a:solidFill>
                         </a:rPr>
                         <a:t>내용 입력</a:t>
@@ -5623,25 +6263,25 @@
                   <a:tcPr anchor="ctr" marL="73152" marR="73152">
                     <a:lnL w="9525" cap="flat" cmpd="sng" algn="ctr">
                       <a:solidFill>
-                        <a:srgbClr val="EFE0D2"/>
+                        <a:srgbClr val="F6E6D5"/>
                       </a:solidFill>
                       <a:prstDash val="solid"/>
                     </a:lnL>
                     <a:lnR w="9525" cap="flat" cmpd="sng" algn="ctr">
                       <a:solidFill>
-                        <a:srgbClr val="EFE0D2"/>
+                        <a:srgbClr val="F6E6D5"/>
                       </a:solidFill>
                       <a:prstDash val="solid"/>
                     </a:lnR>
                     <a:lnT w="9525" cap="flat" cmpd="sng" algn="ctr">
                       <a:solidFill>
-                        <a:srgbClr val="EFE0D2"/>
+                        <a:srgbClr val="F6E6D5"/>
                       </a:solidFill>
                       <a:prstDash val="solid"/>
                     </a:lnT>
                     <a:lnB w="9525" cap="flat" cmpd="sng" algn="ctr">
                       <a:solidFill>
-                        <a:srgbClr val="EFE0D2"/>
+                        <a:srgbClr val="F6E6D5"/>
                       </a:solidFill>
                       <a:prstDash val="solid"/>
                     </a:lnB>
@@ -5659,7 +6299,7 @@
                       <a:r>
                         <a:rPr sz="1500" b="0">
                           <a:solidFill>
-                            <a:srgbClr val="2B2B2B"/>
+                            <a:srgbClr val="26231F"/>
                           </a:solidFill>
                         </a:rPr>
                         <a:t/>
@@ -5669,25 +6309,25 @@
                   <a:tcPr anchor="ctr" marL="73152" marR="73152">
                     <a:lnL w="9525" cap="flat" cmpd="sng" algn="ctr">
                       <a:solidFill>
-                        <a:srgbClr val="EFE0D2"/>
+                        <a:srgbClr val="F6E6D5"/>
                       </a:solidFill>
                       <a:prstDash val="solid"/>
                     </a:lnL>
                     <a:lnR w="9525" cap="flat" cmpd="sng" algn="ctr">
                       <a:solidFill>
-                        <a:srgbClr val="EFE0D2"/>
+                        <a:srgbClr val="F6E6D5"/>
                       </a:solidFill>
                       <a:prstDash val="solid"/>
                     </a:lnR>
                     <a:lnT w="9525" cap="flat" cmpd="sng" algn="ctr">
                       <a:solidFill>
-                        <a:srgbClr val="EFE0D2"/>
+                        <a:srgbClr val="F6E6D5"/>
                       </a:solidFill>
                       <a:prstDash val="solid"/>
                     </a:lnT>
                     <a:lnB w="9525" cap="flat" cmpd="sng" algn="ctr">
                       <a:solidFill>
-                        <a:srgbClr val="EFE0D2"/>
+                        <a:srgbClr val="F6E6D5"/>
                       </a:solidFill>
                       <a:prstDash val="solid"/>
                     </a:lnB>
@@ -5705,7 +6345,7 @@
                       <a:r>
                         <a:rPr sz="1500" b="0">
                           <a:solidFill>
-                            <a:srgbClr val="2B2B2B"/>
+                            <a:srgbClr val="26231F"/>
                           </a:solidFill>
                         </a:rPr>
                         <a:t/>
@@ -5715,25 +6355,25 @@
                   <a:tcPr anchor="ctr" marL="73152" marR="73152">
                     <a:lnL w="9525" cap="flat" cmpd="sng" algn="ctr">
                       <a:solidFill>
-                        <a:srgbClr val="EFE0D2"/>
+                        <a:srgbClr val="F6E6D5"/>
                       </a:solidFill>
                       <a:prstDash val="solid"/>
                     </a:lnL>
                     <a:lnR w="9525" cap="flat" cmpd="sng" algn="ctr">
                       <a:solidFill>
-                        <a:srgbClr val="EFE0D2"/>
+                        <a:srgbClr val="F6E6D5"/>
                       </a:solidFill>
                       <a:prstDash val="solid"/>
                     </a:lnR>
                     <a:lnT w="9525" cap="flat" cmpd="sng" algn="ctr">
                       <a:solidFill>
-                        <a:srgbClr val="EFE0D2"/>
+                        <a:srgbClr val="F6E6D5"/>
                       </a:solidFill>
                       <a:prstDash val="solid"/>
                     </a:lnT>
                     <a:lnB w="9525" cap="flat" cmpd="sng" algn="ctr">
                       <a:solidFill>
-                        <a:srgbClr val="EFE0D2"/>
+                        <a:srgbClr val="F6E6D5"/>
                       </a:solidFill>
                       <a:prstDash val="solid"/>
                     </a:lnB>
@@ -5753,7 +6393,7 @@
                       <a:r>
                         <a:rPr sz="1500" b="1">
                           <a:solidFill>
-                            <a:srgbClr val="3A2918"/>
+                            <a:srgbClr val="493827"/>
                           </a:solidFill>
                         </a:rPr>
                         <a:t>2</a:t>
@@ -5763,30 +6403,30 @@
                   <a:tcPr anchor="ctr" marL="73152" marR="73152">
                     <a:lnL w="9525" cap="flat" cmpd="sng" algn="ctr">
                       <a:solidFill>
-                        <a:srgbClr val="EFE0D2"/>
+                        <a:srgbClr val="F6E6D5"/>
                       </a:solidFill>
                       <a:prstDash val="solid"/>
                     </a:lnL>
                     <a:lnR w="9525" cap="flat" cmpd="sng" algn="ctr">
                       <a:solidFill>
-                        <a:srgbClr val="EFE0D2"/>
+                        <a:srgbClr val="F6E6D5"/>
                       </a:solidFill>
                       <a:prstDash val="solid"/>
                     </a:lnR>
                     <a:lnT w="9525" cap="flat" cmpd="sng" algn="ctr">
                       <a:solidFill>
-                        <a:srgbClr val="EFE0D2"/>
+                        <a:srgbClr val="F6E6D5"/>
                       </a:solidFill>
                       <a:prstDash val="solid"/>
                     </a:lnT>
                     <a:lnB w="9525" cap="flat" cmpd="sng" algn="ctr">
                       <a:solidFill>
-                        <a:srgbClr val="EFE0D2"/>
+                        <a:srgbClr val="F6E6D5"/>
                       </a:solidFill>
                       <a:prstDash val="solid"/>
                     </a:lnB>
                     <a:solidFill>
-                      <a:srgbClr val="EFE0D2"/>
+                      <a:srgbClr val="F6E6D5"/>
                     </a:solidFill>
                   </a:tcPr>
                 </a:tc>
@@ -5799,7 +6439,7 @@
                       <a:r>
                         <a:rPr sz="1500" b="0">
                           <a:solidFill>
-                            <a:srgbClr val="2B2B2B"/>
+                            <a:srgbClr val="26231F"/>
                           </a:solidFill>
                         </a:rPr>
                         <a:t>내용 입력</a:t>
@@ -5809,30 +6449,30 @@
                   <a:tcPr anchor="ctr" marL="73152" marR="73152">
                     <a:lnL w="9525" cap="flat" cmpd="sng" algn="ctr">
                       <a:solidFill>
-                        <a:srgbClr val="EFE0D2"/>
+                        <a:srgbClr val="F6E6D5"/>
                       </a:solidFill>
                       <a:prstDash val="solid"/>
                     </a:lnL>
                     <a:lnR w="9525" cap="flat" cmpd="sng" algn="ctr">
                       <a:solidFill>
-                        <a:srgbClr val="EFE0D2"/>
+                        <a:srgbClr val="F6E6D5"/>
                       </a:solidFill>
                       <a:prstDash val="solid"/>
                     </a:lnR>
                     <a:lnT w="9525" cap="flat" cmpd="sng" algn="ctr">
                       <a:solidFill>
-                        <a:srgbClr val="EFE0D2"/>
+                        <a:srgbClr val="F6E6D5"/>
                       </a:solidFill>
                       <a:prstDash val="solid"/>
                     </a:lnT>
                     <a:lnB w="9525" cap="flat" cmpd="sng" algn="ctr">
                       <a:solidFill>
-                        <a:srgbClr val="EFE0D2"/>
+                        <a:srgbClr val="F6E6D5"/>
                       </a:solidFill>
                       <a:prstDash val="solid"/>
                     </a:lnB>
                     <a:solidFill>
-                      <a:srgbClr val="F9F5F1"/>
+                      <a:srgbClr val="FBF4EC"/>
                     </a:solidFill>
                   </a:tcPr>
                 </a:tc>
@@ -5845,7 +6485,7 @@
                       <a:r>
                         <a:rPr sz="1500" b="0">
                           <a:solidFill>
-                            <a:srgbClr val="2B2B2B"/>
+                            <a:srgbClr val="26231F"/>
                           </a:solidFill>
                         </a:rPr>
                         <a:t/>
@@ -5855,30 +6495,30 @@
                   <a:tcPr anchor="ctr" marL="73152" marR="73152">
                     <a:lnL w="9525" cap="flat" cmpd="sng" algn="ctr">
                       <a:solidFill>
-                        <a:srgbClr val="EFE0D2"/>
+                        <a:srgbClr val="F6E6D5"/>
                       </a:solidFill>
                       <a:prstDash val="solid"/>
                     </a:lnL>
                     <a:lnR w="9525" cap="flat" cmpd="sng" algn="ctr">
                       <a:solidFill>
-                        <a:srgbClr val="EFE0D2"/>
+                        <a:srgbClr val="F6E6D5"/>
                       </a:solidFill>
                       <a:prstDash val="solid"/>
                     </a:lnR>
                     <a:lnT w="9525" cap="flat" cmpd="sng" algn="ctr">
                       <a:solidFill>
-                        <a:srgbClr val="EFE0D2"/>
+                        <a:srgbClr val="F6E6D5"/>
                       </a:solidFill>
                       <a:prstDash val="solid"/>
                     </a:lnT>
                     <a:lnB w="9525" cap="flat" cmpd="sng" algn="ctr">
                       <a:solidFill>
-                        <a:srgbClr val="EFE0D2"/>
+                        <a:srgbClr val="F6E6D5"/>
                       </a:solidFill>
                       <a:prstDash val="solid"/>
                     </a:lnB>
                     <a:solidFill>
-                      <a:srgbClr val="F9F5F1"/>
+                      <a:srgbClr val="FBF4EC"/>
                     </a:solidFill>
                   </a:tcPr>
                 </a:tc>
@@ -5891,7 +6531,7 @@
                       <a:r>
                         <a:rPr sz="1500" b="0">
                           <a:solidFill>
-                            <a:srgbClr val="2B2B2B"/>
+                            <a:srgbClr val="26231F"/>
                           </a:solidFill>
                         </a:rPr>
                         <a:t/>
@@ -5901,30 +6541,30 @@
                   <a:tcPr anchor="ctr" marL="73152" marR="73152">
                     <a:lnL w="9525" cap="flat" cmpd="sng" algn="ctr">
                       <a:solidFill>
-                        <a:srgbClr val="EFE0D2"/>
+                        <a:srgbClr val="F6E6D5"/>
                       </a:solidFill>
                       <a:prstDash val="solid"/>
                     </a:lnL>
                     <a:lnR w="9525" cap="flat" cmpd="sng" algn="ctr">
                       <a:solidFill>
-                        <a:srgbClr val="EFE0D2"/>
+                        <a:srgbClr val="F6E6D5"/>
                       </a:solidFill>
                       <a:prstDash val="solid"/>
                     </a:lnR>
                     <a:lnT w="9525" cap="flat" cmpd="sng" algn="ctr">
                       <a:solidFill>
-                        <a:srgbClr val="EFE0D2"/>
+                        <a:srgbClr val="F6E6D5"/>
                       </a:solidFill>
                       <a:prstDash val="solid"/>
                     </a:lnT>
                     <a:lnB w="9525" cap="flat" cmpd="sng" algn="ctr">
                       <a:solidFill>
-                        <a:srgbClr val="EFE0D2"/>
+                        <a:srgbClr val="F6E6D5"/>
                       </a:solidFill>
                       <a:prstDash val="solid"/>
                     </a:lnB>
                     <a:solidFill>
-                      <a:srgbClr val="F9F5F1"/>
+                      <a:srgbClr val="FBF4EC"/>
                     </a:solidFill>
                   </a:tcPr>
                 </a:tc>
@@ -5939,7 +6579,7 @@
                       <a:r>
                         <a:rPr sz="1500" b="1">
                           <a:solidFill>
-                            <a:srgbClr val="3A2918"/>
+                            <a:srgbClr val="493827"/>
                           </a:solidFill>
                         </a:rPr>
                         <a:t>3</a:t>
@@ -5949,30 +6589,30 @@
                   <a:tcPr anchor="ctr" marL="73152" marR="73152">
                     <a:lnL w="9525" cap="flat" cmpd="sng" algn="ctr">
                       <a:solidFill>
-                        <a:srgbClr val="EFE0D2"/>
+                        <a:srgbClr val="F6E6D5"/>
                       </a:solidFill>
                       <a:prstDash val="solid"/>
                     </a:lnL>
                     <a:lnR w="9525" cap="flat" cmpd="sng" algn="ctr">
                       <a:solidFill>
-                        <a:srgbClr val="EFE0D2"/>
+                        <a:srgbClr val="F6E6D5"/>
                       </a:solidFill>
                       <a:prstDash val="solid"/>
                     </a:lnR>
                     <a:lnT w="9525" cap="flat" cmpd="sng" algn="ctr">
                       <a:solidFill>
-                        <a:srgbClr val="EFE0D2"/>
+                        <a:srgbClr val="F6E6D5"/>
                       </a:solidFill>
                       <a:prstDash val="solid"/>
                     </a:lnT>
                     <a:lnB w="9525" cap="flat" cmpd="sng" algn="ctr">
                       <a:solidFill>
-                        <a:srgbClr val="EFE0D2"/>
+                        <a:srgbClr val="F6E6D5"/>
                       </a:solidFill>
                       <a:prstDash val="solid"/>
                     </a:lnB>
                     <a:solidFill>
-                      <a:srgbClr val="EFE0D2"/>
+                      <a:srgbClr val="F6E6D5"/>
                     </a:solidFill>
                   </a:tcPr>
                 </a:tc>
@@ -5985,7 +6625,7 @@
                       <a:r>
                         <a:rPr sz="1500" b="0">
                           <a:solidFill>
-                            <a:srgbClr val="2B2B2B"/>
+                            <a:srgbClr val="26231F"/>
                           </a:solidFill>
                         </a:rPr>
                         <a:t>내용 입력</a:t>
@@ -5995,25 +6635,25 @@
                   <a:tcPr anchor="ctr" marL="73152" marR="73152">
                     <a:lnL w="9525" cap="flat" cmpd="sng" algn="ctr">
                       <a:solidFill>
-                        <a:srgbClr val="EFE0D2"/>
+                        <a:srgbClr val="F6E6D5"/>
                       </a:solidFill>
                       <a:prstDash val="solid"/>
                     </a:lnL>
                     <a:lnR w="9525" cap="flat" cmpd="sng" algn="ctr">
                       <a:solidFill>
-                        <a:srgbClr val="EFE0D2"/>
+                        <a:srgbClr val="F6E6D5"/>
                       </a:solidFill>
                       <a:prstDash val="solid"/>
                     </a:lnR>
                     <a:lnT w="9525" cap="flat" cmpd="sng" algn="ctr">
                       <a:solidFill>
-                        <a:srgbClr val="EFE0D2"/>
+                        <a:srgbClr val="F6E6D5"/>
                       </a:solidFill>
                       <a:prstDash val="solid"/>
                     </a:lnT>
                     <a:lnB w="9525" cap="flat" cmpd="sng" algn="ctr">
                       <a:solidFill>
-                        <a:srgbClr val="EFE0D2"/>
+                        <a:srgbClr val="F6E6D5"/>
                       </a:solidFill>
                       <a:prstDash val="solid"/>
                     </a:lnB>
@@ -6031,7 +6671,7 @@
                       <a:r>
                         <a:rPr sz="1500" b="0">
                           <a:solidFill>
-                            <a:srgbClr val="2B2B2B"/>
+                            <a:srgbClr val="26231F"/>
                           </a:solidFill>
                         </a:rPr>
                         <a:t/>
@@ -6041,25 +6681,25 @@
                   <a:tcPr anchor="ctr" marL="73152" marR="73152">
                     <a:lnL w="9525" cap="flat" cmpd="sng" algn="ctr">
                       <a:solidFill>
-                        <a:srgbClr val="EFE0D2"/>
+                        <a:srgbClr val="F6E6D5"/>
                       </a:solidFill>
                       <a:prstDash val="solid"/>
                     </a:lnL>
                     <a:lnR w="9525" cap="flat" cmpd="sng" algn="ctr">
                       <a:solidFill>
-                        <a:srgbClr val="EFE0D2"/>
+                        <a:srgbClr val="F6E6D5"/>
                       </a:solidFill>
                       <a:prstDash val="solid"/>
                     </a:lnR>
                     <a:lnT w="9525" cap="flat" cmpd="sng" algn="ctr">
                       <a:solidFill>
-                        <a:srgbClr val="EFE0D2"/>
+                        <a:srgbClr val="F6E6D5"/>
                       </a:solidFill>
                       <a:prstDash val="solid"/>
                     </a:lnT>
                     <a:lnB w="9525" cap="flat" cmpd="sng" algn="ctr">
                       <a:solidFill>
-                        <a:srgbClr val="EFE0D2"/>
+                        <a:srgbClr val="F6E6D5"/>
                       </a:solidFill>
                       <a:prstDash val="solid"/>
                     </a:lnB>
@@ -6077,7 +6717,7 @@
                       <a:r>
                         <a:rPr sz="1500" b="0">
                           <a:solidFill>
-                            <a:srgbClr val="2B2B2B"/>
+                            <a:srgbClr val="26231F"/>
                           </a:solidFill>
                         </a:rPr>
                         <a:t/>
@@ -6087,25 +6727,25 @@
                   <a:tcPr anchor="ctr" marL="73152" marR="73152">
                     <a:lnL w="9525" cap="flat" cmpd="sng" algn="ctr">
                       <a:solidFill>
-                        <a:srgbClr val="EFE0D2"/>
+                        <a:srgbClr val="F6E6D5"/>
                       </a:solidFill>
                       <a:prstDash val="solid"/>
                     </a:lnL>
                     <a:lnR w="9525" cap="flat" cmpd="sng" algn="ctr">
                       <a:solidFill>
-                        <a:srgbClr val="EFE0D2"/>
+                        <a:srgbClr val="F6E6D5"/>
                       </a:solidFill>
                       <a:prstDash val="solid"/>
                     </a:lnR>
                     <a:lnT w="9525" cap="flat" cmpd="sng" algn="ctr">
                       <a:solidFill>
-                        <a:srgbClr val="EFE0D2"/>
+                        <a:srgbClr val="F6E6D5"/>
                       </a:solidFill>
                       <a:prstDash val="solid"/>
                     </a:lnT>
                     <a:lnB w="9525" cap="flat" cmpd="sng" algn="ctr">
                       <a:solidFill>
-                        <a:srgbClr val="EFE0D2"/>
+                        <a:srgbClr val="F6E6D5"/>
                       </a:solidFill>
                       <a:prstDash val="solid"/>
                     </a:lnB>
@@ -6125,7 +6765,7 @@
                       <a:r>
                         <a:rPr sz="1500" b="1">
                           <a:solidFill>
-                            <a:srgbClr val="3A2918"/>
+                            <a:srgbClr val="493827"/>
                           </a:solidFill>
                         </a:rPr>
                         <a:t>4</a:t>
@@ -6135,30 +6775,30 @@
                   <a:tcPr anchor="ctr" marL="73152" marR="73152">
                     <a:lnL w="9525" cap="flat" cmpd="sng" algn="ctr">
                       <a:solidFill>
-                        <a:srgbClr val="EFE0D2"/>
+                        <a:srgbClr val="F6E6D5"/>
                       </a:solidFill>
                       <a:prstDash val="solid"/>
                     </a:lnL>
                     <a:lnR w="9525" cap="flat" cmpd="sng" algn="ctr">
                       <a:solidFill>
-                        <a:srgbClr val="EFE0D2"/>
+                        <a:srgbClr val="F6E6D5"/>
                       </a:solidFill>
                       <a:prstDash val="solid"/>
                     </a:lnR>
                     <a:lnT w="9525" cap="flat" cmpd="sng" algn="ctr">
                       <a:solidFill>
-                        <a:srgbClr val="EFE0D2"/>
+                        <a:srgbClr val="F6E6D5"/>
                       </a:solidFill>
                       <a:prstDash val="solid"/>
                     </a:lnT>
                     <a:lnB w="9525" cap="flat" cmpd="sng" algn="ctr">
                       <a:solidFill>
-                        <a:srgbClr val="EFE0D2"/>
+                        <a:srgbClr val="F6E6D5"/>
                       </a:solidFill>
                       <a:prstDash val="solid"/>
                     </a:lnB>
                     <a:solidFill>
-                      <a:srgbClr val="EFE0D2"/>
+                      <a:srgbClr val="F6E6D5"/>
                     </a:solidFill>
                   </a:tcPr>
                 </a:tc>
@@ -6171,7 +6811,7 @@
                       <a:r>
                         <a:rPr sz="1500" b="0">
                           <a:solidFill>
-                            <a:srgbClr val="2B2B2B"/>
+                            <a:srgbClr val="26231F"/>
                           </a:solidFill>
                         </a:rPr>
                         <a:t>내용 입력</a:t>
@@ -6181,30 +6821,30 @@
                   <a:tcPr anchor="ctr" marL="73152" marR="73152">
                     <a:lnL w="9525" cap="flat" cmpd="sng" algn="ctr">
                       <a:solidFill>
-                        <a:srgbClr val="EFE0D2"/>
+                        <a:srgbClr val="F6E6D5"/>
                       </a:solidFill>
                       <a:prstDash val="solid"/>
                     </a:lnL>
                     <a:lnR w="9525" cap="flat" cmpd="sng" algn="ctr">
                       <a:solidFill>
-                        <a:srgbClr val="EFE0D2"/>
+                        <a:srgbClr val="F6E6D5"/>
                       </a:solidFill>
                       <a:prstDash val="solid"/>
                     </a:lnR>
                     <a:lnT w="9525" cap="flat" cmpd="sng" algn="ctr">
                       <a:solidFill>
-                        <a:srgbClr val="EFE0D2"/>
+                        <a:srgbClr val="F6E6D5"/>
                       </a:solidFill>
                       <a:prstDash val="solid"/>
                     </a:lnT>
                     <a:lnB w="9525" cap="flat" cmpd="sng" algn="ctr">
                       <a:solidFill>
-                        <a:srgbClr val="EFE0D2"/>
+                        <a:srgbClr val="F6E6D5"/>
                       </a:solidFill>
                       <a:prstDash val="solid"/>
                     </a:lnB>
                     <a:solidFill>
-                      <a:srgbClr val="F9F5F1"/>
+                      <a:srgbClr val="FBF4EC"/>
                     </a:solidFill>
                   </a:tcPr>
                 </a:tc>
@@ -6217,7 +6857,7 @@
                       <a:r>
                         <a:rPr sz="1500" b="0">
                           <a:solidFill>
-                            <a:srgbClr val="2B2B2B"/>
+                            <a:srgbClr val="26231F"/>
                           </a:solidFill>
                         </a:rPr>
                         <a:t/>
@@ -6227,30 +6867,30 @@
                   <a:tcPr anchor="ctr" marL="73152" marR="73152">
                     <a:lnL w="9525" cap="flat" cmpd="sng" algn="ctr">
                       <a:solidFill>
-                        <a:srgbClr val="EFE0D2"/>
+                        <a:srgbClr val="F6E6D5"/>
                       </a:solidFill>
                       <a:prstDash val="solid"/>
                     </a:lnL>
                     <a:lnR w="9525" cap="flat" cmpd="sng" algn="ctr">
                       <a:solidFill>
-                        <a:srgbClr val="EFE0D2"/>
+                        <a:srgbClr val="F6E6D5"/>
                       </a:solidFill>
                       <a:prstDash val="solid"/>
                     </a:lnR>
                     <a:lnT w="9525" cap="flat" cmpd="sng" algn="ctr">
                       <a:solidFill>
-                        <a:srgbClr val="EFE0D2"/>
+                        <a:srgbClr val="F6E6D5"/>
                       </a:solidFill>
                       <a:prstDash val="solid"/>
                     </a:lnT>
                     <a:lnB w="9525" cap="flat" cmpd="sng" algn="ctr">
                       <a:solidFill>
-                        <a:srgbClr val="EFE0D2"/>
+                        <a:srgbClr val="F6E6D5"/>
                       </a:solidFill>
                       <a:prstDash val="solid"/>
                     </a:lnB>
                     <a:solidFill>
-                      <a:srgbClr val="F9F5F1"/>
+                      <a:srgbClr val="FBF4EC"/>
                     </a:solidFill>
                   </a:tcPr>
                 </a:tc>
@@ -6263,7 +6903,7 @@
                       <a:r>
                         <a:rPr sz="1500" b="0">
                           <a:solidFill>
-                            <a:srgbClr val="2B2B2B"/>
+                            <a:srgbClr val="26231F"/>
                           </a:solidFill>
                         </a:rPr>
                         <a:t/>
@@ -6273,30 +6913,30 @@
                   <a:tcPr anchor="ctr" marL="73152" marR="73152">
                     <a:lnL w="9525" cap="flat" cmpd="sng" algn="ctr">
                       <a:solidFill>
-                        <a:srgbClr val="EFE0D2"/>
+                        <a:srgbClr val="F6E6D5"/>
                       </a:solidFill>
                       <a:prstDash val="solid"/>
                     </a:lnL>
                     <a:lnR w="9525" cap="flat" cmpd="sng" algn="ctr">
                       <a:solidFill>
-                        <a:srgbClr val="EFE0D2"/>
+                        <a:srgbClr val="F6E6D5"/>
                       </a:solidFill>
                       <a:prstDash val="solid"/>
                     </a:lnR>
                     <a:lnT w="9525" cap="flat" cmpd="sng" algn="ctr">
                       <a:solidFill>
-                        <a:srgbClr val="EFE0D2"/>
+                        <a:srgbClr val="F6E6D5"/>
                       </a:solidFill>
                       <a:prstDash val="solid"/>
                     </a:lnT>
                     <a:lnB w="9525" cap="flat" cmpd="sng" algn="ctr">
                       <a:solidFill>
-                        <a:srgbClr val="EFE0D2"/>
+                        <a:srgbClr val="F6E6D5"/>
                       </a:solidFill>
                       <a:prstDash val="solid"/>
                     </a:lnB>
                     <a:solidFill>
-                      <a:srgbClr val="F9F5F1"/>
+                      <a:srgbClr val="FBF4EC"/>
                     </a:solidFill>
                   </a:tcPr>
                 </a:tc>
@@ -6311,7 +6951,7 @@
                       <a:r>
                         <a:rPr sz="1500" b="1">
                           <a:solidFill>
-                            <a:srgbClr val="3A2918"/>
+                            <a:srgbClr val="493827"/>
                           </a:solidFill>
                         </a:rPr>
                         <a:t>5</a:t>
@@ -6321,30 +6961,30 @@
                   <a:tcPr anchor="ctr" marL="73152" marR="73152">
                     <a:lnL w="9525" cap="flat" cmpd="sng" algn="ctr">
                       <a:solidFill>
-                        <a:srgbClr val="EFE0D2"/>
+                        <a:srgbClr val="F6E6D5"/>
                       </a:solidFill>
                       <a:prstDash val="solid"/>
                     </a:lnL>
                     <a:lnR w="9525" cap="flat" cmpd="sng" algn="ctr">
                       <a:solidFill>
-                        <a:srgbClr val="EFE0D2"/>
+                        <a:srgbClr val="F6E6D5"/>
                       </a:solidFill>
                       <a:prstDash val="solid"/>
                     </a:lnR>
                     <a:lnT w="9525" cap="flat" cmpd="sng" algn="ctr">
                       <a:solidFill>
-                        <a:srgbClr val="EFE0D2"/>
+                        <a:srgbClr val="F6E6D5"/>
                       </a:solidFill>
                       <a:prstDash val="solid"/>
                     </a:lnT>
                     <a:lnB w="9525" cap="flat" cmpd="sng" algn="ctr">
                       <a:solidFill>
-                        <a:srgbClr val="EFE0D2"/>
+                        <a:srgbClr val="F6E6D5"/>
                       </a:solidFill>
                       <a:prstDash val="solid"/>
                     </a:lnB>
                     <a:solidFill>
-                      <a:srgbClr val="EFE0D2"/>
+                      <a:srgbClr val="F6E6D5"/>
                     </a:solidFill>
                   </a:tcPr>
                 </a:tc>
@@ -6357,7 +6997,7 @@
                       <a:r>
                         <a:rPr sz="1500" b="0">
                           <a:solidFill>
-                            <a:srgbClr val="2B2B2B"/>
+                            <a:srgbClr val="26231F"/>
                           </a:solidFill>
                         </a:rPr>
                         <a:t>내용 입력</a:t>
@@ -6367,25 +7007,25 @@
                   <a:tcPr anchor="ctr" marL="73152" marR="73152">
                     <a:lnL w="9525" cap="flat" cmpd="sng" algn="ctr">
                       <a:solidFill>
-                        <a:srgbClr val="EFE0D2"/>
+                        <a:srgbClr val="F6E6D5"/>
                       </a:solidFill>
                       <a:prstDash val="solid"/>
                     </a:lnL>
                     <a:lnR w="9525" cap="flat" cmpd="sng" algn="ctr">
                       <a:solidFill>
-                        <a:srgbClr val="EFE0D2"/>
+                        <a:srgbClr val="F6E6D5"/>
                       </a:solidFill>
                       <a:prstDash val="solid"/>
                     </a:lnR>
                     <a:lnT w="9525" cap="flat" cmpd="sng" algn="ctr">
                       <a:solidFill>
-                        <a:srgbClr val="EFE0D2"/>
+                        <a:srgbClr val="F6E6D5"/>
                       </a:solidFill>
                       <a:prstDash val="solid"/>
                     </a:lnT>
                     <a:lnB w="9525" cap="flat" cmpd="sng" algn="ctr">
                       <a:solidFill>
-                        <a:srgbClr val="EFE0D2"/>
+                        <a:srgbClr val="F6E6D5"/>
                       </a:solidFill>
                       <a:prstDash val="solid"/>
                     </a:lnB>
@@ -6403,7 +7043,7 @@
                       <a:r>
                         <a:rPr sz="1500" b="0">
                           <a:solidFill>
-                            <a:srgbClr val="2B2B2B"/>
+                            <a:srgbClr val="26231F"/>
                           </a:solidFill>
                         </a:rPr>
                         <a:t/>
@@ -6413,25 +7053,25 @@
                   <a:tcPr anchor="ctr" marL="73152" marR="73152">
                     <a:lnL w="9525" cap="flat" cmpd="sng" algn="ctr">
                       <a:solidFill>
-                        <a:srgbClr val="EFE0D2"/>
+                        <a:srgbClr val="F6E6D5"/>
                       </a:solidFill>
                       <a:prstDash val="solid"/>
                     </a:lnL>
                     <a:lnR w="9525" cap="flat" cmpd="sng" algn="ctr">
                       <a:solidFill>
-                        <a:srgbClr val="EFE0D2"/>
+                        <a:srgbClr val="F6E6D5"/>
                       </a:solidFill>
                       <a:prstDash val="solid"/>
                     </a:lnR>
                     <a:lnT w="9525" cap="flat" cmpd="sng" algn="ctr">
                       <a:solidFill>
-                        <a:srgbClr val="EFE0D2"/>
+                        <a:srgbClr val="F6E6D5"/>
                       </a:solidFill>
                       <a:prstDash val="solid"/>
                     </a:lnT>
                     <a:lnB w="9525" cap="flat" cmpd="sng" algn="ctr">
                       <a:solidFill>
-                        <a:srgbClr val="EFE0D2"/>
+                        <a:srgbClr val="F6E6D5"/>
                       </a:solidFill>
                       <a:prstDash val="solid"/>
                     </a:lnB>
@@ -6449,7 +7089,7 @@
                       <a:r>
                         <a:rPr sz="1500" b="0">
                           <a:solidFill>
-                            <a:srgbClr val="2B2B2B"/>
+                            <a:srgbClr val="26231F"/>
                           </a:solidFill>
                         </a:rPr>
                         <a:t/>
@@ -6459,25 +7099,25 @@
                   <a:tcPr anchor="ctr" marL="73152" marR="73152">
                     <a:lnL w="9525" cap="flat" cmpd="sng" algn="ctr">
                       <a:solidFill>
-                        <a:srgbClr val="EFE0D2"/>
+                        <a:srgbClr val="F6E6D5"/>
                       </a:solidFill>
                       <a:prstDash val="solid"/>
                     </a:lnL>
                     <a:lnR w="9525" cap="flat" cmpd="sng" algn="ctr">
                       <a:solidFill>
-                        <a:srgbClr val="EFE0D2"/>
+                        <a:srgbClr val="F6E6D5"/>
                       </a:solidFill>
                       <a:prstDash val="solid"/>
                     </a:lnR>
                     <a:lnT w="9525" cap="flat" cmpd="sng" algn="ctr">
                       <a:solidFill>
-                        <a:srgbClr val="EFE0D2"/>
+                        <a:srgbClr val="F6E6D5"/>
                       </a:solidFill>
                       <a:prstDash val="solid"/>
                     </a:lnT>
                     <a:lnB w="9525" cap="flat" cmpd="sng" algn="ctr">
                       <a:solidFill>
-                        <a:srgbClr val="EFE0D2"/>
+                        <a:srgbClr val="F6E6D5"/>
                       </a:solidFill>
                       <a:prstDash val="solid"/>
                     </a:lnB>
@@ -6502,6 +7142,14 @@
 <file path=ppt/slides/slide6.xml><?xml version="1.0" encoding="utf-8"?>
 <p:sld xmlns:a="http://schemas.openxmlformats.org/drawingml/2006/main" xmlns:p="http://schemas.openxmlformats.org/presentationml/2006/main" xmlns:r="http://schemas.openxmlformats.org/officeDocument/2006/relationships">
   <p:cSld>
+    <p:bg>
+      <p:bgPr>
+        <a:solidFill>
+          <a:srgbClr val="493827"/>
+        </a:solidFill>
+        <a:effectLst/>
+      </p:bgPr>
+    </p:bg>
     <p:spTree>
       <p:nvGrpSpPr>
         <p:cNvPr id="1" name=""/>
@@ -6509,30 +7157,131 @@
         <p:nvPr/>
       </p:nvGrpSpPr>
       <p:grpSpPr/>
-      <p:pic>
-        <p:nvPicPr>
-          <p:cNvPr id="3" name="표지 그림" descr="talk-35.jpg"/>
-          <p:cNvPicPr>
-            <a:picLocks noChangeAspect="1"/>
-          </p:cNvPicPr>
+      <p:sp>
+        <p:nvSpPr>
+          <p:cNvPr id="3" name="장식"/>
+          <p:cNvSpPr/>
           <p:nvPr/>
-        </p:nvPicPr>
-        <p:blipFill>
-          <a:blip r:embed="rId2"/>
-          <a:stretch>
-            <a:fillRect/>
-          </a:stretch>
-        </p:blipFill>
-        <p:spPr>
-          <a:xfrm>
-            <a:off x="0" y="0"/>
-            <a:ext cx="12191695" cy="6858000"/>
+        </p:nvSpPr>
+        <p:spPr>
+          <a:xfrm>
+            <a:off x="-1463040" y="3749039"/>
+            <a:ext cx="5486400" cy="5486400"/>
+          </a:xfrm>
+          <a:prstGeom prst="ellipse">
+            <a:avLst/>
+          </a:prstGeom>
+          <a:solidFill>
+            <a:srgbClr val="D8A879"/>
+          </a:solidFill>
+          <a:ln>
+            <a:noFill/>
+          </a:ln>
+        </p:spPr>
+        <p:txBody>
+          <a:bodyPr rtlCol="0" anchor="ctr"/>
+          <a:lstStyle/>
+          <a:p>
+            <a:pPr algn="ctr"/>
+          </a:p>
+        </p:txBody>
+      </p:sp>
+      <p:sp>
+        <p:nvSpPr>
+          <p:cNvPr id="4" name="장식"/>
+          <p:cNvSpPr/>
+          <p:nvPr/>
+        </p:nvSpPr>
+        <p:spPr>
+          <a:xfrm>
+            <a:off x="9997190" y="1371600"/>
+            <a:ext cx="457200" cy="457200"/>
+          </a:xfrm>
+          <a:prstGeom prst="ellipse">
+            <a:avLst/>
+          </a:prstGeom>
+          <a:solidFill>
+            <a:srgbClr val="A6815C"/>
+          </a:solidFill>
+          <a:ln>
+            <a:noFill/>
+          </a:ln>
+        </p:spPr>
+        <p:txBody>
+          <a:bodyPr rtlCol="0" anchor="ctr"/>
+          <a:lstStyle/>
+          <a:p>
+            <a:pPr algn="ctr"/>
+          </a:p>
+        </p:txBody>
+      </p:sp>
+      <p:sp>
+        <p:nvSpPr>
+          <p:cNvPr id="5" name="장식"/>
+          <p:cNvSpPr/>
+          <p:nvPr/>
+        </p:nvSpPr>
+        <p:spPr>
+          <a:xfrm>
+            <a:off x="10972525" y="2468879"/>
+            <a:ext cx="182880" cy="182880"/>
+          </a:xfrm>
+          <a:prstGeom prst="ellipse">
+            <a:avLst/>
+          </a:prstGeom>
+          <a:solidFill>
+            <a:srgbClr val="D8A879"/>
+          </a:solidFill>
+          <a:ln>
+            <a:noFill/>
+          </a:ln>
+        </p:spPr>
+        <p:txBody>
+          <a:bodyPr rtlCol="0" anchor="ctr"/>
+          <a:lstStyle/>
+          <a:p>
+            <a:pPr algn="ctr"/>
+          </a:p>
+        </p:txBody>
+      </p:sp>
+      <p:sp>
+        <p:nvSpPr>
+          <p:cNvPr id="6" name="라벨"/>
+          <p:cNvSpPr txBox="1"/>
+          <p:nvPr/>
+        </p:nvSpPr>
+        <p:spPr>
+          <a:xfrm>
+            <a:off x="822960" y="1600200"/>
+            <a:ext cx="5608179" cy="274320"/>
           </a:xfrm>
           <a:prstGeom prst="rect">
             <a:avLst/>
           </a:prstGeom>
-        </p:spPr>
-      </p:pic>
+          <a:noFill/>
+        </p:spPr>
+        <p:txBody>
+          <a:bodyPr wrap="square" lIns="54864" rIns="54864" tIns="27432" bIns="27432" anchor="t">
+            <a:noAutofit/>
+          </a:bodyPr>
+          <a:lstStyle/>
+          <a:p>
+            <a:pPr algn="l">
+              <a:lnSpc>
+                <a:spcPct val="115000"/>
+              </a:lnSpc>
+            </a:pPr>
+            <a:r>
+              <a:rPr sz="1000" b="1" i="0" spc="250">
+                <a:solidFill>
+                  <a:srgbClr val="FFFFFF"/>
+                </a:solidFill>
+              </a:rPr>
+              <a:t>PRESENTATION</a:t>
+            </a:r>
+          </a:p>
+        </p:txBody>
+      </p:sp>
       <p:sp>
         <p:nvSpPr>
           <p:cNvPr id="2" name="Title 1"/>
@@ -6545,8 +7294,8 @@
         </p:nvSpPr>
         <p:spPr>
           <a:xfrm>
-            <a:off x="853418" y="2057400"/>
-            <a:ext cx="6095847" cy="1554480"/>
+            <a:off x="822960" y="2057400"/>
+            <a:ext cx="5608179" cy="1188720"/>
           </a:xfrm>
         </p:spPr>
         <p:txBody>
@@ -6561,9 +7310,9 @@
               </a:lnSpc>
             </a:pPr>
             <a:r>
-              <a:rPr sz="3600" b="1" i="0">
+              <a:rPr sz="4000" b="1" i="0">
                 <a:solidFill>
-                  <a:srgbClr val="3A2918"/>
+                  <a:srgbClr val="FFFFFF"/>
                 </a:solidFill>
               </a:rPr>
               <a:t>감사합니다</a:t>
@@ -6573,14 +7322,14 @@
       </p:sp>
       <p:sp>
         <p:nvSpPr>
-          <p:cNvPr id="4" name="한 줄 문구"/>
+          <p:cNvPr id="7" name="한 줄 문구"/>
           <p:cNvSpPr txBox="1"/>
           <p:nvPr/>
         </p:nvSpPr>
         <p:spPr>
           <a:xfrm>
-            <a:off x="853418" y="3749039"/>
-            <a:ext cx="6095847" cy="822960"/>
+            <a:off x="822960" y="3337560"/>
+            <a:ext cx="5608179" cy="822960"/>
           </a:xfrm>
           <a:prstGeom prst="rect">
             <a:avLst/>
@@ -6599,9 +7348,9 @@
               </a:lnSpc>
             </a:pPr>
             <a:r>
-              <a:rPr sz="1700" b="0" i="1">
+              <a:rPr sz="1700" b="0" i="0">
                 <a:solidFill>
-                  <a:srgbClr val="3A2918"/>
+                  <a:srgbClr val="FFFFFF"/>
                 </a:solidFill>
               </a:rPr>
               <a:t>끝까지 들어 주셔서 고맙습니다</a:t>
@@ -6611,14 +7360,14 @@
       </p:sp>
       <p:sp>
         <p:nvSpPr>
-          <p:cNvPr id="5" name="안내 문구"/>
+          <p:cNvPr id="8" name="안내 문구"/>
           <p:cNvSpPr txBox="1"/>
           <p:nvPr/>
         </p:nvSpPr>
         <p:spPr>
           <a:xfrm>
-            <a:off x="853418" y="4617720"/>
-            <a:ext cx="6095847" cy="914400"/>
+            <a:off x="822960" y="4206240"/>
+            <a:ext cx="5608179" cy="914400"/>
           </a:xfrm>
           <a:prstGeom prst="rect">
             <a:avLst/>
@@ -6639,7 +7388,7 @@
             <a:r>
               <a:rPr sz="1400" b="0" i="0">
                 <a:solidFill>
-                  <a:srgbClr val="666666"/>
+                  <a:srgbClr val="FFFFFF"/>
                 </a:solidFill>
               </a:rPr>
               <a:t>문의 · 연락처를 입력하세요</a:t>
@@ -6666,34 +7415,34 @@
         <a:sysClr val="window" lastClr="FFFFFF"/>
       </a:lt1>
       <a:dk2>
-        <a:srgbClr val="3A2918"/>
+        <a:srgbClr val="493827"/>
       </a:dk2>
       <a:lt2>
-        <a:srgbClr val="F9F5F1"/>
+        <a:srgbClr val="FBF4EC"/>
       </a:lt2>
       <a:accent1>
-        <a:srgbClr val="7B5732"/>
+        <a:srgbClr val="D8A879"/>
       </a:accent1>
       <a:accent2>
-        <a:srgbClr val="3B9191"/>
+        <a:srgbClr val="E1DF98"/>
       </a:accent2>
       <a:accent3>
-        <a:srgbClr val="3A2918"/>
+        <a:srgbClr val="493827"/>
       </a:accent3>
       <a:accent4>
-        <a:srgbClr val="EFE0D2"/>
+        <a:srgbClr val="F6E6D5"/>
       </a:accent4>
       <a:accent5>
-        <a:srgbClr val="5B7462"/>
+        <a:srgbClr val="DCC488"/>
       </a:accent5>
       <a:accent6>
-        <a:srgbClr val="897F74"/>
+        <a:srgbClr val="92887D"/>
       </a:accent6>
       <a:hlink>
-        <a:srgbClr val="7B5732"/>
+        <a:srgbClr val="D8A879"/>
       </a:hlink>
       <a:folHlink>
-        <a:srgbClr val="3A2918"/>
+        <a:srgbClr val="493827"/>
       </a:folHlink>
     </a:clrScheme>
     <a:fontScheme name="Office">
